--- a/decks/iac-drift/iac-drift.pptx
+++ b/decks/iac-drift/iac-drift.pptx
@@ -1210,6 +1210,13 @@
 <file path=ppt/slides/slide1.xml><?xml version="1.0" encoding="utf-8"?>
 <p:sld xmlns:a="http://schemas.openxmlformats.org/drawingml/2006/main" xmlns:r="http://schemas.openxmlformats.org/officeDocument/2006/relationships" xmlns:p="http://schemas.openxmlformats.org/presentationml/2006/main">
   <p:cSld name="Slide 1">
+    <p:bg>
+      <p:bgPr>
+        <a:solidFill>
+          <a:srgbClr val="F2F0EB"/>
+        </a:solidFill>
+      </p:bgPr>
+    </p:bg>
     <p:spTree>
       <p:nvGrpSpPr>
         <p:cNvPr id="1" name=""/>
@@ -1224,30 +1231,519 @@
           <a:chExt cx="0" cy="0"/>
         </a:xfrm>
       </p:grpSpPr>
-      <p:pic>
-        <p:nvPicPr>
-          <p:cNvPr id="2" name="Image 0" descr="/tmp/slide-1787840583712-h5edo4b1hij.png">    </p:cNvPr>
-          <p:cNvPicPr>
-            <a:picLocks noChangeAspect="1"/>
-          </p:cNvPicPr>
-          <p:nvPr/>
-        </p:nvPicPr>
-        <p:blipFill>
-          <a:blip r:embed="rId1"/>
-          <a:stretch>
-            <a:fillRect/>
-          </a:stretch>
-        </p:blipFill>
-        <p:spPr>
-          <a:xfrm>
-            <a:off x="0" y="0"/>
-            <a:ext cx="12188952" cy="6858000"/>
-          </a:xfrm>
-          <a:prstGeom prst="rect">
-            <a:avLst/>
-          </a:prstGeom>
-        </p:spPr>
-      </p:pic>
+      <p:sp>
+        <p:nvSpPr>
+          <p:cNvPr id="2" name="Text 0"/>
+          <p:cNvSpPr/>
+          <p:nvPr/>
+        </p:nvSpPr>
+        <p:spPr>
+          <a:xfrm>
+            <a:off x="677098" y="541734"/>
+            <a:ext cx="3941888" cy="260747"/>
+          </a:xfrm>
+          <a:prstGeom prst="rect">
+            <a:avLst/>
+          </a:prstGeom>
+          <a:noFill/>
+          <a:ln/>
+        </p:spPr>
+        <p:txBody>
+          <a:bodyPr wrap="square" lIns="0" tIns="0" rIns="0" bIns="0" rtlCol="0" anchor="t"/>
+          <a:lstStyle/>
+          <a:p>
+            <a:pPr algn="l" indent="0" marL="0">
+              <a:lnSpc>
+                <a:spcPts val="2053"/>
+              </a:lnSpc>
+              <a:buNone/>
+            </a:pPr>
+            <a:r>
+              <a:rPr lang="en-US" sz="1466" dirty="0">
+                <a:solidFill>
+                  <a:srgbClr val="111111"/>
+                </a:solidFill>
+                <a:latin typeface="Inter" pitchFamily="34" charset="0"/>
+                <a:ea typeface="Inter" pitchFamily="34" charset="-122"/>
+                <a:cs typeface="Inter" pitchFamily="34" charset="-120"/>
+              </a:rPr>
+              <a:t>PLATFORM ENGINEERING · INTERNAL</a:t>
+            </a:r>
+            <a:endParaRPr lang="en-US" sz="1466" dirty="0"/>
+          </a:p>
+        </p:txBody>
+      </p:sp>
+      <p:sp>
+        <p:nvSpPr>
+          <p:cNvPr id="3" name="Text 1"/>
+          <p:cNvSpPr/>
+          <p:nvPr/>
+        </p:nvSpPr>
+        <p:spPr>
+          <a:xfrm>
+            <a:off x="10823448" y="541734"/>
+            <a:ext cx="702174" cy="260747"/>
+          </a:xfrm>
+          <a:prstGeom prst="rect">
+            <a:avLst/>
+          </a:prstGeom>
+          <a:noFill/>
+          <a:ln/>
+        </p:spPr>
+        <p:txBody>
+          <a:bodyPr wrap="square" lIns="0" tIns="0" rIns="0" bIns="0" rtlCol="0" anchor="t"/>
+          <a:lstStyle/>
+          <a:p>
+            <a:pPr algn="l" indent="0" marL="0">
+              <a:lnSpc>
+                <a:spcPts val="2053"/>
+              </a:lnSpc>
+              <a:buNone/>
+            </a:pPr>
+            <a:r>
+              <a:rPr lang="en-US" sz="1466" dirty="0">
+                <a:solidFill>
+                  <a:srgbClr val="111111"/>
+                </a:solidFill>
+                <a:latin typeface="Inter" pitchFamily="34" charset="0"/>
+                <a:ea typeface="Inter" pitchFamily="34" charset="-122"/>
+                <a:cs typeface="Inter" pitchFamily="34" charset="-120"/>
+              </a:rPr>
+              <a:t>01 / 05</a:t>
+            </a:r>
+            <a:endParaRPr lang="en-US" sz="1466" dirty="0"/>
+          </a:p>
+        </p:txBody>
+      </p:sp>
+      <p:sp>
+        <p:nvSpPr>
+          <p:cNvPr id="4" name="Text 2"/>
+          <p:cNvSpPr/>
+          <p:nvPr/>
+        </p:nvSpPr>
+        <p:spPr>
+          <a:xfrm>
+            <a:off x="677098" y="937816"/>
+            <a:ext cx="10834756" cy="50800"/>
+          </a:xfrm>
+          <a:prstGeom prst="rect">
+            <a:avLst/>
+          </a:prstGeom>
+          <a:solidFill>
+            <a:srgbClr val="111111"/>
+          </a:solidFill>
+          <a:ln/>
+        </p:spPr>
+        <p:txBody>
+          <a:bodyPr wrap="square" rtlCol="0" anchor="ctr"/>
+          <a:lstStyle/>
+          <a:p>
+            <a:pPr indent="0" marL="0">
+              <a:buNone/>
+            </a:pPr>
+            <a:endParaRPr lang="en-US" dirty="0"/>
+          </a:p>
+        </p:txBody>
+      </p:sp>
+      <p:sp>
+        <p:nvSpPr>
+          <p:cNvPr id="5" name="Text 3"/>
+          <p:cNvSpPr/>
+          <p:nvPr/>
+        </p:nvSpPr>
+        <p:spPr>
+          <a:xfrm>
+            <a:off x="677098" y="1315045"/>
+            <a:ext cx="11051451" cy="934641"/>
+          </a:xfrm>
+          <a:prstGeom prst="rect">
+            <a:avLst/>
+          </a:prstGeom>
+          <a:noFill/>
+          <a:ln/>
+        </p:spPr>
+        <p:txBody>
+          <a:bodyPr wrap="square" lIns="0" tIns="0" rIns="0" bIns="0" rtlCol="0" anchor="t"/>
+          <a:lstStyle/>
+          <a:p>
+            <a:pPr algn="l" indent="0" marL="0">
+              <a:lnSpc>
+                <a:spcPts val="7359"/>
+              </a:lnSpc>
+              <a:buNone/>
+            </a:pPr>
+            <a:r>
+              <a:rPr lang="en-US" sz="6133" b="1" dirty="0">
+                <a:solidFill>
+                  <a:srgbClr val="111111"/>
+                </a:solidFill>
+                <a:latin typeface="ArchivoBlack" pitchFamily="34" charset="0"/>
+                <a:ea typeface="ArchivoBlack" pitchFamily="34" charset="-122"/>
+                <a:cs typeface="ArchivoBlack" pitchFamily="34" charset="-120"/>
+              </a:rPr>
+              <a:t>INFRASTRUCTURE</a:t>
+            </a:r>
+            <a:endParaRPr lang="en-US" sz="6133" dirty="0"/>
+          </a:p>
+        </p:txBody>
+      </p:sp>
+      <p:sp>
+        <p:nvSpPr>
+          <p:cNvPr id="6" name="Text 4"/>
+          <p:cNvSpPr/>
+          <p:nvPr/>
+        </p:nvSpPr>
+        <p:spPr>
+          <a:xfrm>
+            <a:off x="677098" y="2283420"/>
+            <a:ext cx="7247368" cy="2682081"/>
+          </a:xfrm>
+          <a:prstGeom prst="rect">
+            <a:avLst/>
+          </a:prstGeom>
+          <a:noFill/>
+          <a:ln/>
+        </p:spPr>
+        <p:txBody>
+          <a:bodyPr wrap="square" lIns="0" tIns="0" rIns="0" bIns="0" rtlCol="0" anchor="t"/>
+          <a:lstStyle/>
+          <a:p>
+            <a:pPr algn="l" indent="0" marL="0">
+              <a:lnSpc>
+                <a:spcPts val="21117"/>
+              </a:lnSpc>
+              <a:buNone/>
+            </a:pPr>
+            <a:r>
+              <a:rPr lang="en-US" sz="17598" b="1" dirty="0">
+                <a:solidFill>
+                  <a:srgbClr val="FF4A1C"/>
+                </a:solidFill>
+                <a:latin typeface="ArchivoBlack" pitchFamily="34" charset="0"/>
+                <a:ea typeface="ArchivoBlack" pitchFamily="34" charset="-122"/>
+                <a:cs typeface="ArchivoBlack" pitchFamily="34" charset="-120"/>
+              </a:rPr>
+              <a:t>DRIFT</a:t>
+            </a:r>
+            <a:endParaRPr lang="en-US" sz="17598" dirty="0"/>
+          </a:p>
+        </p:txBody>
+      </p:sp>
+      <p:sp>
+        <p:nvSpPr>
+          <p:cNvPr id="7" name="Text 5"/>
+          <p:cNvSpPr/>
+          <p:nvPr/>
+        </p:nvSpPr>
+        <p:spPr>
+          <a:xfrm>
+            <a:off x="8120810" y="2283420"/>
+            <a:ext cx="3391044" cy="2682081"/>
+          </a:xfrm>
+          <a:prstGeom prst="rect">
+            <a:avLst/>
+          </a:prstGeom>
+          <a:solidFill>
+            <a:srgbClr val="111111"/>
+          </a:solidFill>
+          <a:ln/>
+        </p:spPr>
+        <p:txBody>
+          <a:bodyPr wrap="square" rtlCol="0" anchor="ctr"/>
+          <a:lstStyle/>
+          <a:p>
+            <a:pPr indent="0" marL="0">
+              <a:buNone/>
+            </a:pPr>
+            <a:endParaRPr lang="en-US" dirty="0"/>
+          </a:p>
+        </p:txBody>
+      </p:sp>
+      <p:sp>
+        <p:nvSpPr>
+          <p:cNvPr id="8" name="Text 6"/>
+          <p:cNvSpPr/>
+          <p:nvPr/>
+        </p:nvSpPr>
+        <p:spPr>
+          <a:xfrm>
+            <a:off x="8425534" y="3063081"/>
+            <a:ext cx="2837229" cy="374253"/>
+          </a:xfrm>
+          <a:prstGeom prst="rect">
+            <a:avLst/>
+          </a:prstGeom>
+          <a:noFill/>
+          <a:ln/>
+        </p:spPr>
+        <p:txBody>
+          <a:bodyPr wrap="square" lIns="0" tIns="0" rIns="0" bIns="0" rtlCol="0" anchor="t"/>
+          <a:lstStyle/>
+          <a:p>
+            <a:pPr algn="l" indent="0" marL="0">
+              <a:lnSpc>
+                <a:spcPts val="2946"/>
+              </a:lnSpc>
+              <a:buNone/>
+            </a:pPr>
+            <a:r>
+              <a:rPr lang="en-US" sz="2266" b="1" dirty="0">
+                <a:solidFill>
+                  <a:srgbClr val="F2F0EB"/>
+                </a:solidFill>
+                <a:latin typeface="ArchivoBlack" pitchFamily="34" charset="0"/>
+                <a:ea typeface="ArchivoBlack" pitchFamily="34" charset="-122"/>
+                <a:cs typeface="ArchivoBlack" pitchFamily="34" charset="-120"/>
+              </a:rPr>
+              <a:t>THE CHANGE</a:t>
+            </a:r>
+            <a:endParaRPr lang="en-US" sz="2266" dirty="0"/>
+          </a:p>
+        </p:txBody>
+      </p:sp>
+      <p:sp>
+        <p:nvSpPr>
+          <p:cNvPr id="9" name="Text 7"/>
+          <p:cNvSpPr/>
+          <p:nvPr/>
+        </p:nvSpPr>
+        <p:spPr>
+          <a:xfrm>
+            <a:off x="8425534" y="3437334"/>
+            <a:ext cx="2837229" cy="374253"/>
+          </a:xfrm>
+          <a:prstGeom prst="rect">
+            <a:avLst/>
+          </a:prstGeom>
+          <a:noFill/>
+          <a:ln/>
+        </p:spPr>
+        <p:txBody>
+          <a:bodyPr wrap="square" lIns="0" tIns="0" rIns="0" bIns="0" rtlCol="0" anchor="t"/>
+          <a:lstStyle/>
+          <a:p>
+            <a:pPr algn="l" indent="0" marL="0">
+              <a:lnSpc>
+                <a:spcPts val="2946"/>
+              </a:lnSpc>
+              <a:buNone/>
+            </a:pPr>
+            <a:r>
+              <a:rPr lang="en-US" sz="2266" b="1" dirty="0">
+                <a:solidFill>
+                  <a:srgbClr val="F2F0EB"/>
+                </a:solidFill>
+                <a:latin typeface="ArchivoBlack" pitchFamily="34" charset="0"/>
+                <a:ea typeface="ArchivoBlack" pitchFamily="34" charset="-122"/>
+                <a:cs typeface="ArchivoBlack" pitchFamily="34" charset="-120"/>
+              </a:rPr>
+              <a:t>SOMEONE MADE</a:t>
+            </a:r>
+            <a:endParaRPr lang="en-US" sz="2266" dirty="0"/>
+          </a:p>
+        </p:txBody>
+      </p:sp>
+      <p:sp>
+        <p:nvSpPr>
+          <p:cNvPr id="10" name="Text 8"/>
+          <p:cNvSpPr/>
+          <p:nvPr/>
+        </p:nvSpPr>
+        <p:spPr>
+          <a:xfrm>
+            <a:off x="8425534" y="3811588"/>
+            <a:ext cx="2837229" cy="374253"/>
+          </a:xfrm>
+          <a:prstGeom prst="rect">
+            <a:avLst/>
+          </a:prstGeom>
+          <a:noFill/>
+          <a:ln/>
+        </p:spPr>
+        <p:txBody>
+          <a:bodyPr wrap="square" lIns="0" tIns="0" rIns="0" bIns="0" rtlCol="0" anchor="t"/>
+          <a:lstStyle/>
+          <a:p>
+            <a:pPr algn="l" indent="0" marL="0">
+              <a:lnSpc>
+                <a:spcPts val="2946"/>
+              </a:lnSpc>
+              <a:buNone/>
+            </a:pPr>
+            <a:r>
+              <a:rPr lang="en-US" sz="2266" b="1" dirty="0">
+                <a:solidFill>
+                  <a:srgbClr val="F2F0EB"/>
+                </a:solidFill>
+                <a:latin typeface="ArchivoBlack" pitchFamily="34" charset="0"/>
+                <a:ea typeface="ArchivoBlack" pitchFamily="34" charset="-122"/>
+                <a:cs typeface="ArchivoBlack" pitchFamily="34" charset="-120"/>
+              </a:rPr>
+              <a:t>BY HAND</a:t>
+            </a:r>
+            <a:endParaRPr lang="en-US" sz="2266" dirty="0"/>
+          </a:p>
+        </p:txBody>
+      </p:sp>
+      <p:sp>
+        <p:nvSpPr>
+          <p:cNvPr id="11" name="Text 9"/>
+          <p:cNvSpPr/>
+          <p:nvPr/>
+        </p:nvSpPr>
+        <p:spPr>
+          <a:xfrm>
+            <a:off x="677098" y="5168702"/>
+            <a:ext cx="10360609" cy="441920"/>
+          </a:xfrm>
+          <a:prstGeom prst="rect">
+            <a:avLst/>
+          </a:prstGeom>
+          <a:noFill/>
+          <a:ln/>
+        </p:spPr>
+        <p:txBody>
+          <a:bodyPr wrap="square" lIns="0" tIns="0" rIns="0" bIns="0" rtlCol="0" anchor="t"/>
+          <a:lstStyle/>
+          <a:p>
+            <a:pPr algn="l" indent="0" marL="0">
+              <a:lnSpc>
+                <a:spcPts val="3480"/>
+              </a:lnSpc>
+              <a:spcBef>
+                <a:spcPts val="1600"/>
+              </a:spcBef>
+              <a:buNone/>
+            </a:pPr>
+            <a:r>
+              <a:rPr lang="en-US" sz="2400" dirty="0">
+                <a:solidFill>
+                  <a:srgbClr val="111111"/>
+                </a:solidFill>
+                <a:latin typeface="Inter" pitchFamily="34" charset="0"/>
+                <a:ea typeface="Inter" pitchFamily="34" charset="-122"/>
+                <a:cs typeface="Inter" pitchFamily="34" charset="-120"/>
+              </a:rPr>
+              <a:t>Drift is not a tooling problem. The console is still a valid write path.</a:t>
+            </a:r>
+            <a:endParaRPr lang="en-US" sz="2400" dirty="0"/>
+          </a:p>
+        </p:txBody>
+      </p:sp>
+      <p:sp>
+        <p:nvSpPr>
+          <p:cNvPr id="12" name="Text 10"/>
+          <p:cNvSpPr/>
+          <p:nvPr/>
+        </p:nvSpPr>
+        <p:spPr>
+          <a:xfrm>
+            <a:off x="677098" y="5869384"/>
+            <a:ext cx="10834756" cy="50800"/>
+          </a:xfrm>
+          <a:prstGeom prst="rect">
+            <a:avLst/>
+          </a:prstGeom>
+          <a:solidFill>
+            <a:srgbClr val="111111"/>
+          </a:solidFill>
+          <a:ln/>
+        </p:spPr>
+        <p:txBody>
+          <a:bodyPr wrap="square" rtlCol="0" anchor="ctr"/>
+          <a:lstStyle/>
+          <a:p>
+            <a:pPr indent="0" marL="0">
+              <a:buNone/>
+            </a:pPr>
+            <a:endParaRPr lang="en-US" dirty="0"/>
+          </a:p>
+        </p:txBody>
+      </p:sp>
+      <p:sp>
+        <p:nvSpPr>
+          <p:cNvPr id="13" name="Text 11"/>
+          <p:cNvSpPr/>
+          <p:nvPr/>
+        </p:nvSpPr>
+        <p:spPr>
+          <a:xfrm>
+            <a:off x="677098" y="6055519"/>
+            <a:ext cx="2056338" cy="260747"/>
+          </a:xfrm>
+          <a:prstGeom prst="rect">
+            <a:avLst/>
+          </a:prstGeom>
+          <a:noFill/>
+          <a:ln/>
+        </p:spPr>
+        <p:txBody>
+          <a:bodyPr wrap="square" lIns="0" tIns="0" rIns="0" bIns="0" rtlCol="0" anchor="t"/>
+          <a:lstStyle/>
+          <a:p>
+            <a:pPr algn="l" indent="0" marL="0">
+              <a:lnSpc>
+                <a:spcPts val="2053"/>
+              </a:lnSpc>
+              <a:buNone/>
+            </a:pPr>
+            <a:r>
+              <a:rPr lang="en-US" sz="1466" dirty="0">
+                <a:solidFill>
+                  <a:srgbClr val="111111"/>
+                </a:solidFill>
+                <a:latin typeface="Inter" pitchFamily="34" charset="0"/>
+                <a:ea typeface="Inter" pitchFamily="34" charset="-122"/>
+                <a:cs typeface="Inter" pitchFamily="34" charset="-120"/>
+              </a:rPr>
+              <a:t>PRESENTER · TEAM</a:t>
+            </a:r>
+            <a:endParaRPr lang="en-US" sz="1466" dirty="0"/>
+          </a:p>
+        </p:txBody>
+      </p:sp>
+      <p:sp>
+        <p:nvSpPr>
+          <p:cNvPr id="14" name="Text 12"/>
+          <p:cNvSpPr/>
+          <p:nvPr/>
+        </p:nvSpPr>
+        <p:spPr>
+          <a:xfrm>
+            <a:off x="8890357" y="6055519"/>
+            <a:ext cx="2673928" cy="260747"/>
+          </a:xfrm>
+          <a:prstGeom prst="rect">
+            <a:avLst/>
+          </a:prstGeom>
+          <a:noFill/>
+          <a:ln/>
+        </p:spPr>
+        <p:txBody>
+          <a:bodyPr wrap="square" lIns="0" tIns="0" rIns="0" bIns="0" rtlCol="0" anchor="t"/>
+          <a:lstStyle/>
+          <a:p>
+            <a:pPr algn="l" indent="0" marL="0">
+              <a:lnSpc>
+                <a:spcPts val="2053"/>
+              </a:lnSpc>
+              <a:buNone/>
+            </a:pPr>
+            <a:r>
+              <a:rPr lang="en-US" sz="1466" dirty="0">
+                <a:solidFill>
+                  <a:srgbClr val="111111"/>
+                </a:solidFill>
+                <a:latin typeface="Inter" pitchFamily="34" charset="0"/>
+                <a:ea typeface="Inter" pitchFamily="34" charset="-122"/>
+                <a:cs typeface="Inter" pitchFamily="34" charset="-120"/>
+              </a:rPr>
+              <a:t>INFRASTRUCTURE DRIFT</a:t>
+            </a:r>
+            <a:endParaRPr lang="en-US" sz="1466" dirty="0"/>
+          </a:p>
+        </p:txBody>
+      </p:sp>
     </p:spTree>
   </p:cSld>
   <p:clrMapOvr>
@@ -1259,6 +1755,13 @@
 <file path=ppt/slides/slide2.xml><?xml version="1.0" encoding="utf-8"?>
 <p:sld xmlns:a="http://schemas.openxmlformats.org/drawingml/2006/main" xmlns:r="http://schemas.openxmlformats.org/officeDocument/2006/relationships" xmlns:p="http://schemas.openxmlformats.org/presentationml/2006/main">
   <p:cSld name="Slide 2">
+    <p:bg>
+      <p:bgPr>
+        <a:solidFill>
+          <a:srgbClr val="F2F0EB"/>
+        </a:solidFill>
+      </p:bgPr>
+    </p:bg>
     <p:spTree>
       <p:nvGrpSpPr>
         <p:cNvPr id="1" name=""/>
@@ -1273,30 +1776,1072 @@
           <a:chExt cx="0" cy="0"/>
         </a:xfrm>
       </p:grpSpPr>
+      <p:sp>
+        <p:nvSpPr>
+          <p:cNvPr id="2" name="Text 0"/>
+          <p:cNvSpPr/>
+          <p:nvPr/>
+        </p:nvSpPr>
+        <p:spPr>
+          <a:xfrm>
+            <a:off x="677098" y="541734"/>
+            <a:ext cx="3784253" cy="260747"/>
+          </a:xfrm>
+          <a:prstGeom prst="rect">
+            <a:avLst/>
+          </a:prstGeom>
+          <a:noFill/>
+          <a:ln/>
+        </p:spPr>
+        <p:txBody>
+          <a:bodyPr wrap="square" lIns="0" tIns="0" rIns="0" bIns="0" rtlCol="0" anchor="t"/>
+          <a:lstStyle/>
+          <a:p>
+            <a:pPr algn="l" indent="0" marL="0">
+              <a:lnSpc>
+                <a:spcPts val="2053"/>
+              </a:lnSpc>
+              <a:buNone/>
+            </a:pPr>
+            <a:r>
+              <a:rPr lang="en-US" sz="1466" dirty="0">
+                <a:solidFill>
+                  <a:srgbClr val="111111"/>
+                </a:solidFill>
+                <a:latin typeface="Inter" pitchFamily="34" charset="0"/>
+                <a:ea typeface="Inter" pitchFamily="34" charset="-122"/>
+                <a:cs typeface="Inter" pitchFamily="34" charset="-120"/>
+              </a:rPr>
+              <a:t>02 · WHAT DRIFT ACTUALLY COSTS</a:t>
+            </a:r>
+            <a:endParaRPr lang="en-US" sz="1466" dirty="0"/>
+          </a:p>
+        </p:txBody>
+      </p:sp>
+      <p:sp>
+        <p:nvSpPr>
+          <p:cNvPr id="3" name="Text 1"/>
+          <p:cNvSpPr/>
+          <p:nvPr/>
+        </p:nvSpPr>
+        <p:spPr>
+          <a:xfrm>
+            <a:off x="10785358" y="541734"/>
+            <a:ext cx="741026" cy="260747"/>
+          </a:xfrm>
+          <a:prstGeom prst="rect">
+            <a:avLst/>
+          </a:prstGeom>
+          <a:noFill/>
+          <a:ln/>
+        </p:spPr>
+        <p:txBody>
+          <a:bodyPr wrap="square" lIns="0" tIns="0" rIns="0" bIns="0" rtlCol="0" anchor="t"/>
+          <a:lstStyle/>
+          <a:p>
+            <a:pPr algn="l" indent="0" marL="0">
+              <a:lnSpc>
+                <a:spcPts val="2053"/>
+              </a:lnSpc>
+              <a:buNone/>
+            </a:pPr>
+            <a:r>
+              <a:rPr lang="en-US" sz="1466" dirty="0">
+                <a:solidFill>
+                  <a:srgbClr val="111111"/>
+                </a:solidFill>
+                <a:latin typeface="Inter" pitchFamily="34" charset="0"/>
+                <a:ea typeface="Inter" pitchFamily="34" charset="-122"/>
+                <a:cs typeface="Inter" pitchFamily="34" charset="-120"/>
+              </a:rPr>
+              <a:t>02 / 05</a:t>
+            </a:r>
+            <a:endParaRPr lang="en-US" sz="1466" dirty="0"/>
+          </a:p>
+        </p:txBody>
+      </p:sp>
+      <p:sp>
+        <p:nvSpPr>
+          <p:cNvPr id="4" name="Text 2"/>
+          <p:cNvSpPr/>
+          <p:nvPr/>
+        </p:nvSpPr>
+        <p:spPr>
+          <a:xfrm>
+            <a:off x="677098" y="937816"/>
+            <a:ext cx="10834756" cy="50800"/>
+          </a:xfrm>
+          <a:prstGeom prst="rect">
+            <a:avLst/>
+          </a:prstGeom>
+          <a:solidFill>
+            <a:srgbClr val="111111"/>
+          </a:solidFill>
+          <a:ln/>
+        </p:spPr>
+        <p:txBody>
+          <a:bodyPr wrap="square" rtlCol="0" anchor="ctr"/>
+          <a:lstStyle/>
+          <a:p>
+            <a:pPr indent="0" marL="0">
+              <a:buNone/>
+            </a:pPr>
+            <a:endParaRPr lang="en-US" dirty="0"/>
+          </a:p>
+        </p:txBody>
+      </p:sp>
+      <p:sp>
+        <p:nvSpPr>
+          <p:cNvPr id="5" name="Text 3"/>
+          <p:cNvSpPr/>
+          <p:nvPr/>
+        </p:nvSpPr>
+        <p:spPr>
+          <a:xfrm>
+            <a:off x="677098" y="1259483"/>
+            <a:ext cx="11051451" cy="690761"/>
+          </a:xfrm>
+          <a:prstGeom prst="rect">
+            <a:avLst/>
+          </a:prstGeom>
+          <a:noFill/>
+          <a:ln/>
+        </p:spPr>
+        <p:txBody>
+          <a:bodyPr wrap="square" lIns="0" tIns="0" rIns="0" bIns="0" rtlCol="0" anchor="t"/>
+          <a:lstStyle/>
+          <a:p>
+            <a:pPr algn="l" indent="0" marL="0">
+              <a:lnSpc>
+                <a:spcPts val="5439"/>
+              </a:lnSpc>
+              <a:spcAft>
+                <a:spcPts val="2133"/>
+              </a:spcAft>
+              <a:buNone/>
+            </a:pPr>
+            <a:r>
+              <a:rPr lang="en-US" sz="4533" b="1" dirty="0">
+                <a:solidFill>
+                  <a:srgbClr val="111111"/>
+                </a:solidFill>
+                <a:latin typeface="ArchivoBlack" pitchFamily="34" charset="0"/>
+                <a:ea typeface="ArchivoBlack" pitchFamily="34" charset="-122"/>
+                <a:cs typeface="ArchivoBlack" pitchFamily="34" charset="-120"/>
+              </a:rPr>
+              <a:t>The plan stops being true</a:t>
+            </a:r>
+            <a:endParaRPr lang="en-US" sz="4533" dirty="0"/>
+          </a:p>
+        </p:txBody>
+      </p:sp>
+      <p:sp>
+        <p:nvSpPr>
+          <p:cNvPr id="6" name="Text 4"/>
+          <p:cNvSpPr/>
+          <p:nvPr/>
+        </p:nvSpPr>
+        <p:spPr>
+          <a:xfrm>
+            <a:off x="677098" y="2221111"/>
+            <a:ext cx="2454653" cy="1727200"/>
+          </a:xfrm>
+          <a:prstGeom prst="rect">
+            <a:avLst/>
+          </a:prstGeom>
+          <a:noFill/>
+          <a:ln w="25397">
+            <a:solidFill>
+              <a:srgbClr val="111111"/>
+            </a:solidFill>
+          </a:ln>
+        </p:spPr>
+        <p:txBody>
+          <a:bodyPr wrap="square" rtlCol="0" anchor="ctr"/>
+          <a:lstStyle/>
+          <a:p>
+            <a:pPr indent="0" marL="0">
+              <a:buNone/>
+            </a:pPr>
+            <a:endParaRPr lang="en-US" dirty="0"/>
+          </a:p>
+        </p:txBody>
+      </p:sp>
+      <p:sp>
+        <p:nvSpPr>
+          <p:cNvPr id="7" name="Text 5"/>
+          <p:cNvSpPr/>
+          <p:nvPr/>
+        </p:nvSpPr>
+        <p:spPr>
+          <a:xfrm>
+            <a:off x="905641" y="2449711"/>
+            <a:ext cx="372374" cy="372467"/>
+          </a:xfrm>
+          <a:prstGeom prst="rect">
+            <a:avLst/>
+          </a:prstGeom>
+          <a:solidFill>
+            <a:srgbClr val="111111"/>
+          </a:solidFill>
+          <a:ln/>
+        </p:spPr>
+        <p:txBody>
+          <a:bodyPr wrap="square" rtlCol="0" anchor="ctr"/>
+          <a:lstStyle/>
+          <a:p>
+            <a:pPr indent="0" marL="0">
+              <a:buNone/>
+            </a:pPr>
+            <a:endParaRPr lang="en-US" dirty="0"/>
+          </a:p>
+        </p:txBody>
+      </p:sp>
+      <p:sp>
+        <p:nvSpPr>
+          <p:cNvPr id="8" name="Text 6"/>
+          <p:cNvSpPr/>
+          <p:nvPr/>
+        </p:nvSpPr>
+        <p:spPr>
+          <a:xfrm>
+            <a:off x="1015548" y="2531864"/>
+            <a:ext cx="155409" cy="343694"/>
+          </a:xfrm>
+          <a:prstGeom prst="rect">
+            <a:avLst/>
+          </a:prstGeom>
+          <a:noFill/>
+          <a:ln/>
+        </p:spPr>
+        <p:txBody>
+          <a:bodyPr wrap="square" lIns="0" tIns="0" rIns="0" bIns="0" rtlCol="0" anchor="t"/>
+          <a:lstStyle/>
+          <a:p>
+            <a:pPr algn="l" indent="0" marL="0">
+              <a:lnSpc>
+                <a:spcPts val="2706"/>
+              </a:lnSpc>
+              <a:spcBef>
+                <a:spcPts val="1067"/>
+              </a:spcBef>
+              <a:buNone/>
+            </a:pPr>
+            <a:r>
+              <a:rPr lang="en-US" sz="1866" dirty="0">
+                <a:solidFill>
+                  <a:srgbClr val="F2F0EB"/>
+                </a:solidFill>
+                <a:latin typeface="ArchivoBlack" pitchFamily="34" charset="0"/>
+                <a:ea typeface="ArchivoBlack" pitchFamily="34" charset="-122"/>
+                <a:cs typeface="ArchivoBlack" pitchFamily="34" charset="-120"/>
+              </a:rPr>
+              <a:t>1</a:t>
+            </a:r>
+            <a:endParaRPr lang="en-US" sz="1866" dirty="0"/>
+          </a:p>
+        </p:txBody>
+      </p:sp>
+      <p:sp>
+        <p:nvSpPr>
+          <p:cNvPr id="9" name="Text 7"/>
+          <p:cNvSpPr/>
+          <p:nvPr/>
+        </p:nvSpPr>
+        <p:spPr>
+          <a:xfrm>
+            <a:off x="905641" y="2957513"/>
+            <a:ext cx="2037519" cy="687388"/>
+          </a:xfrm>
+          <a:prstGeom prst="rect">
+            <a:avLst/>
+          </a:prstGeom>
+          <a:noFill/>
+          <a:ln/>
+        </p:spPr>
+        <p:txBody>
+          <a:bodyPr wrap="square" lIns="0" tIns="0" rIns="0" bIns="0" rtlCol="0" anchor="t"/>
+          <a:lstStyle/>
+          <a:p>
+            <a:pPr algn="l" indent="0" marL="0">
+              <a:lnSpc>
+                <a:spcPts val="2706"/>
+              </a:lnSpc>
+              <a:spcBef>
+                <a:spcPts val="1067"/>
+              </a:spcBef>
+              <a:buNone/>
+            </a:pPr>
+            <a:r>
+              <a:rPr lang="en-US" sz="1866" dirty="0">
+                <a:solidFill>
+                  <a:srgbClr val="111111"/>
+                </a:solidFill>
+                <a:latin typeface="Inter" pitchFamily="34" charset="0"/>
+                <a:ea typeface="Inter" pitchFamily="34" charset="-122"/>
+                <a:cs typeface="Inter" pitchFamily="34" charset="-120"/>
+              </a:rPr>
+              <a:t>A change is made in the console</a:t>
+            </a:r>
+            <a:endParaRPr lang="en-US" sz="1866" dirty="0"/>
+          </a:p>
+        </p:txBody>
+      </p:sp>
       <p:pic>
         <p:nvPicPr>
-          <p:cNvPr id="2" name="Image 0" descr="/tmp/slide-1787840583978-8yruqxu64ks.png">    </p:cNvPr>
+          <p:cNvPr id="10" name="Image 0" descr="preencoded.png">    </p:cNvPr>
           <p:cNvPicPr>
             <a:picLocks noChangeAspect="1"/>
           </p:cNvPicPr>
           <p:nvPr/>
         </p:nvPicPr>
         <p:blipFill>
-          <a:blip r:embed="rId1"/>
+          <a:blip r:embed="rId1">
+            <a:extLst>
+              <a:ext uri="{96DAC541-7B7A-43D3-8B79-37D633B846F1}">
+                <asvg:svgBlip xmlns:asvg="http://schemas.microsoft.com/office/drawing/2016/SVG/main" r:embed="rId2"/>
+              </a:ext>
+            </a:extLst>
+          </a:blip>
           <a:stretch>
             <a:fillRect/>
           </a:stretch>
         </p:blipFill>
         <p:spPr>
           <a:xfrm>
-            <a:off x="0" y="0"/>
-            <a:ext cx="12188952" cy="6858000"/>
+            <a:off x="3131751" y="2915444"/>
+            <a:ext cx="338450" cy="338534"/>
           </a:xfrm>
           <a:prstGeom prst="rect">
             <a:avLst/>
           </a:prstGeom>
         </p:spPr>
       </p:pic>
+      <p:sp>
+        <p:nvSpPr>
+          <p:cNvPr id="11" name="Text 8"/>
+          <p:cNvSpPr/>
+          <p:nvPr/>
+        </p:nvSpPr>
+        <p:spPr>
+          <a:xfrm>
+            <a:off x="3470201" y="2221111"/>
+            <a:ext cx="2454653" cy="1727200"/>
+          </a:xfrm>
+          <a:prstGeom prst="rect">
+            <a:avLst/>
+          </a:prstGeom>
+          <a:noFill/>
+          <a:ln w="25397">
+            <a:solidFill>
+              <a:srgbClr val="111111"/>
+            </a:solidFill>
+          </a:ln>
+        </p:spPr>
+        <p:txBody>
+          <a:bodyPr wrap="square" rtlCol="0" anchor="ctr"/>
+          <a:lstStyle/>
+          <a:p>
+            <a:pPr indent="0" marL="0">
+              <a:buNone/>
+            </a:pPr>
+            <a:endParaRPr lang="en-US" dirty="0"/>
+          </a:p>
+        </p:txBody>
+      </p:sp>
+      <p:sp>
+        <p:nvSpPr>
+          <p:cNvPr id="12" name="Text 9"/>
+          <p:cNvSpPr/>
+          <p:nvPr/>
+        </p:nvSpPr>
+        <p:spPr>
+          <a:xfrm>
+            <a:off x="3698744" y="2449711"/>
+            <a:ext cx="372374" cy="372467"/>
+          </a:xfrm>
+          <a:prstGeom prst="rect">
+            <a:avLst/>
+          </a:prstGeom>
+          <a:solidFill>
+            <a:srgbClr val="111111"/>
+          </a:solidFill>
+          <a:ln/>
+        </p:spPr>
+        <p:txBody>
+          <a:bodyPr wrap="square" rtlCol="0" anchor="ctr"/>
+          <a:lstStyle/>
+          <a:p>
+            <a:pPr indent="0" marL="0">
+              <a:buNone/>
+            </a:pPr>
+            <a:endParaRPr lang="en-US" dirty="0"/>
+          </a:p>
+        </p:txBody>
+      </p:sp>
+      <p:sp>
+        <p:nvSpPr>
+          <p:cNvPr id="13" name="Text 10"/>
+          <p:cNvSpPr/>
+          <p:nvPr/>
+        </p:nvSpPr>
+        <p:spPr>
+          <a:xfrm>
+            <a:off x="3808651" y="2531864"/>
+            <a:ext cx="155409" cy="343694"/>
+          </a:xfrm>
+          <a:prstGeom prst="rect">
+            <a:avLst/>
+          </a:prstGeom>
+          <a:noFill/>
+          <a:ln/>
+        </p:spPr>
+        <p:txBody>
+          <a:bodyPr wrap="square" lIns="0" tIns="0" rIns="0" bIns="0" rtlCol="0" anchor="t"/>
+          <a:lstStyle/>
+          <a:p>
+            <a:pPr algn="l" indent="0" marL="0">
+              <a:lnSpc>
+                <a:spcPts val="2706"/>
+              </a:lnSpc>
+              <a:spcBef>
+                <a:spcPts val="1067"/>
+              </a:spcBef>
+              <a:buNone/>
+            </a:pPr>
+            <a:r>
+              <a:rPr lang="en-US" sz="1866" dirty="0">
+                <a:solidFill>
+                  <a:srgbClr val="F2F0EB"/>
+                </a:solidFill>
+                <a:latin typeface="ArchivoBlack" pitchFamily="34" charset="0"/>
+                <a:ea typeface="ArchivoBlack" pitchFamily="34" charset="-122"/>
+                <a:cs typeface="ArchivoBlack" pitchFamily="34" charset="-120"/>
+              </a:rPr>
+              <a:t>2</a:t>
+            </a:r>
+            <a:endParaRPr lang="en-US" sz="1866" dirty="0"/>
+          </a:p>
+        </p:txBody>
+      </p:sp>
+      <p:sp>
+        <p:nvSpPr>
+          <p:cNvPr id="14" name="Text 11"/>
+          <p:cNvSpPr/>
+          <p:nvPr/>
+        </p:nvSpPr>
+        <p:spPr>
+          <a:xfrm>
+            <a:off x="3698744" y="2957513"/>
+            <a:ext cx="2037519" cy="687388"/>
+          </a:xfrm>
+          <a:prstGeom prst="rect">
+            <a:avLst/>
+          </a:prstGeom>
+          <a:noFill/>
+          <a:ln/>
+        </p:spPr>
+        <p:txBody>
+          <a:bodyPr wrap="square" lIns="0" tIns="0" rIns="0" bIns="0" rtlCol="0" anchor="t"/>
+          <a:lstStyle/>
+          <a:p>
+            <a:pPr algn="l" indent="0" marL="0">
+              <a:lnSpc>
+                <a:spcPts val="2706"/>
+              </a:lnSpc>
+              <a:spcBef>
+                <a:spcPts val="1067"/>
+              </a:spcBef>
+              <a:buNone/>
+            </a:pPr>
+            <a:r>
+              <a:rPr lang="en-US" sz="1866" dirty="0">
+                <a:solidFill>
+                  <a:srgbClr val="111111"/>
+                </a:solidFill>
+                <a:latin typeface="Inter" pitchFamily="34" charset="0"/>
+                <a:ea typeface="Inter" pitchFamily="34" charset="-122"/>
+                <a:cs typeface="Inter" pitchFamily="34" charset="-120"/>
+              </a:rPr>
+              <a:t>Plan shows a diff nobody ordered</a:t>
+            </a:r>
+            <a:endParaRPr lang="en-US" sz="1866" dirty="0"/>
+          </a:p>
+        </p:txBody>
+      </p:sp>
+      <p:pic>
+        <p:nvPicPr>
+          <p:cNvPr id="15" name="Image 1" descr="preencoded.png">    </p:cNvPr>
+          <p:cNvPicPr>
+            <a:picLocks noChangeAspect="1"/>
+          </p:cNvPicPr>
+          <p:nvPr/>
+        </p:nvPicPr>
+        <p:blipFill>
+          <a:blip r:embed="rId3">
+            <a:extLst>
+              <a:ext uri="{96DAC541-7B7A-43D3-8B79-37D633B846F1}">
+                <asvg:svgBlip xmlns:asvg="http://schemas.microsoft.com/office/drawing/2016/SVG/main" r:embed="rId4"/>
+              </a:ext>
+            </a:extLst>
+          </a:blip>
+          <a:stretch>
+            <a:fillRect/>
+          </a:stretch>
+        </p:blipFill>
+        <p:spPr>
+          <a:xfrm>
+            <a:off x="5924854" y="2915444"/>
+            <a:ext cx="338450" cy="338534"/>
+          </a:xfrm>
+          <a:prstGeom prst="rect">
+            <a:avLst/>
+          </a:prstGeom>
+        </p:spPr>
+      </p:pic>
+      <p:sp>
+        <p:nvSpPr>
+          <p:cNvPr id="16" name="Text 12"/>
+          <p:cNvSpPr/>
+          <p:nvPr/>
+        </p:nvSpPr>
+        <p:spPr>
+          <a:xfrm>
+            <a:off x="6263304" y="2221111"/>
+            <a:ext cx="2454653" cy="1727200"/>
+          </a:xfrm>
+          <a:prstGeom prst="rect">
+            <a:avLst/>
+          </a:prstGeom>
+          <a:noFill/>
+          <a:ln w="25397">
+            <a:solidFill>
+              <a:srgbClr val="111111"/>
+            </a:solidFill>
+          </a:ln>
+        </p:spPr>
+        <p:txBody>
+          <a:bodyPr wrap="square" rtlCol="0" anchor="ctr"/>
+          <a:lstStyle/>
+          <a:p>
+            <a:pPr indent="0" marL="0">
+              <a:buNone/>
+            </a:pPr>
+            <a:endParaRPr lang="en-US" dirty="0"/>
+          </a:p>
+        </p:txBody>
+      </p:sp>
+      <p:sp>
+        <p:nvSpPr>
+          <p:cNvPr id="17" name="Text 13"/>
+          <p:cNvSpPr/>
+          <p:nvPr/>
+        </p:nvSpPr>
+        <p:spPr>
+          <a:xfrm>
+            <a:off x="6491847" y="2449711"/>
+            <a:ext cx="372374" cy="372467"/>
+          </a:xfrm>
+          <a:prstGeom prst="rect">
+            <a:avLst/>
+          </a:prstGeom>
+          <a:solidFill>
+            <a:srgbClr val="111111"/>
+          </a:solidFill>
+          <a:ln/>
+        </p:spPr>
+        <p:txBody>
+          <a:bodyPr wrap="square" rtlCol="0" anchor="ctr"/>
+          <a:lstStyle/>
+          <a:p>
+            <a:pPr indent="0" marL="0">
+              <a:buNone/>
+            </a:pPr>
+            <a:endParaRPr lang="en-US" dirty="0"/>
+          </a:p>
+        </p:txBody>
+      </p:sp>
+      <p:sp>
+        <p:nvSpPr>
+          <p:cNvPr id="18" name="Text 14"/>
+          <p:cNvSpPr/>
+          <p:nvPr/>
+        </p:nvSpPr>
+        <p:spPr>
+          <a:xfrm>
+            <a:off x="6601754" y="2531864"/>
+            <a:ext cx="155409" cy="343694"/>
+          </a:xfrm>
+          <a:prstGeom prst="rect">
+            <a:avLst/>
+          </a:prstGeom>
+          <a:noFill/>
+          <a:ln/>
+        </p:spPr>
+        <p:txBody>
+          <a:bodyPr wrap="square" lIns="0" tIns="0" rIns="0" bIns="0" rtlCol="0" anchor="t"/>
+          <a:lstStyle/>
+          <a:p>
+            <a:pPr algn="l" indent="0" marL="0">
+              <a:lnSpc>
+                <a:spcPts val="2706"/>
+              </a:lnSpc>
+              <a:spcBef>
+                <a:spcPts val="1067"/>
+              </a:spcBef>
+              <a:buNone/>
+            </a:pPr>
+            <a:r>
+              <a:rPr lang="en-US" sz="1866" dirty="0">
+                <a:solidFill>
+                  <a:srgbClr val="F2F0EB"/>
+                </a:solidFill>
+                <a:latin typeface="ArchivoBlack" pitchFamily="34" charset="0"/>
+                <a:ea typeface="ArchivoBlack" pitchFamily="34" charset="-122"/>
+                <a:cs typeface="ArchivoBlack" pitchFamily="34" charset="-120"/>
+              </a:rPr>
+              <a:t>3</a:t>
+            </a:r>
+            <a:endParaRPr lang="en-US" sz="1866" dirty="0"/>
+          </a:p>
+        </p:txBody>
+      </p:sp>
+      <p:sp>
+        <p:nvSpPr>
+          <p:cNvPr id="19" name="Text 15"/>
+          <p:cNvSpPr/>
+          <p:nvPr/>
+        </p:nvSpPr>
+        <p:spPr>
+          <a:xfrm>
+            <a:off x="6491847" y="2957513"/>
+            <a:ext cx="2037519" cy="687388"/>
+          </a:xfrm>
+          <a:prstGeom prst="rect">
+            <a:avLst/>
+          </a:prstGeom>
+          <a:noFill/>
+          <a:ln/>
+        </p:spPr>
+        <p:txBody>
+          <a:bodyPr wrap="square" lIns="0" tIns="0" rIns="0" bIns="0" rtlCol="0" anchor="t"/>
+          <a:lstStyle/>
+          <a:p>
+            <a:pPr algn="l" indent="0" marL="0">
+              <a:lnSpc>
+                <a:spcPts val="2706"/>
+              </a:lnSpc>
+              <a:spcBef>
+                <a:spcPts val="1067"/>
+              </a:spcBef>
+              <a:buNone/>
+            </a:pPr>
+            <a:r>
+              <a:rPr lang="en-US" sz="1866" dirty="0">
+                <a:solidFill>
+                  <a:srgbClr val="111111"/>
+                </a:solidFill>
+                <a:latin typeface="Inter" pitchFamily="34" charset="0"/>
+                <a:ea typeface="Inter" pitchFamily="34" charset="-122"/>
+                <a:cs typeface="Inter" pitchFamily="34" charset="-120"/>
+              </a:rPr>
+              <a:t>Apply is now risky, so it waits</a:t>
+            </a:r>
+            <a:endParaRPr lang="en-US" sz="1866" dirty="0"/>
+          </a:p>
+        </p:txBody>
+      </p:sp>
+      <p:pic>
+        <p:nvPicPr>
+          <p:cNvPr id="20" name="Image 2" descr="preencoded.png">    </p:cNvPr>
+          <p:cNvPicPr>
+            <a:picLocks noChangeAspect="1"/>
+          </p:cNvPicPr>
+          <p:nvPr/>
+        </p:nvPicPr>
+        <p:blipFill>
+          <a:blip r:embed="rId5">
+            <a:extLst>
+              <a:ext uri="{96DAC541-7B7A-43D3-8B79-37D633B846F1}">
+                <asvg:svgBlip xmlns:asvg="http://schemas.microsoft.com/office/drawing/2016/SVG/main" r:embed="rId6"/>
+              </a:ext>
+            </a:extLst>
+          </a:blip>
+          <a:stretch>
+            <a:fillRect/>
+          </a:stretch>
+        </p:blipFill>
+        <p:spPr>
+          <a:xfrm>
+            <a:off x="8717957" y="2915444"/>
+            <a:ext cx="338450" cy="338534"/>
+          </a:xfrm>
+          <a:prstGeom prst="rect">
+            <a:avLst/>
+          </a:prstGeom>
+        </p:spPr>
+      </p:pic>
+      <p:sp>
+        <p:nvSpPr>
+          <p:cNvPr id="21" name="Text 16"/>
+          <p:cNvSpPr/>
+          <p:nvPr/>
+        </p:nvSpPr>
+        <p:spPr>
+          <a:xfrm>
+            <a:off x="9056407" y="2221111"/>
+            <a:ext cx="2454653" cy="1727200"/>
+          </a:xfrm>
+          <a:prstGeom prst="rect">
+            <a:avLst/>
+          </a:prstGeom>
+          <a:noFill/>
+          <a:ln w="25397">
+            <a:solidFill>
+              <a:srgbClr val="111111"/>
+            </a:solidFill>
+          </a:ln>
+        </p:spPr>
+        <p:txBody>
+          <a:bodyPr wrap="square" rtlCol="0" anchor="ctr"/>
+          <a:lstStyle/>
+          <a:p>
+            <a:pPr indent="0" marL="0">
+              <a:buNone/>
+            </a:pPr>
+            <a:endParaRPr lang="en-US" dirty="0"/>
+          </a:p>
+        </p:txBody>
+      </p:sp>
+      <p:sp>
+        <p:nvSpPr>
+          <p:cNvPr id="22" name="Text 17"/>
+          <p:cNvSpPr/>
+          <p:nvPr/>
+        </p:nvSpPr>
+        <p:spPr>
+          <a:xfrm>
+            <a:off x="9284950" y="2449711"/>
+            <a:ext cx="372374" cy="372467"/>
+          </a:xfrm>
+          <a:prstGeom prst="rect">
+            <a:avLst/>
+          </a:prstGeom>
+          <a:solidFill>
+            <a:srgbClr val="111111"/>
+          </a:solidFill>
+          <a:ln/>
+        </p:spPr>
+        <p:txBody>
+          <a:bodyPr wrap="square" rtlCol="0" anchor="ctr"/>
+          <a:lstStyle/>
+          <a:p>
+            <a:pPr indent="0" marL="0">
+              <a:buNone/>
+            </a:pPr>
+            <a:endParaRPr lang="en-US" dirty="0"/>
+          </a:p>
+        </p:txBody>
+      </p:sp>
+      <p:sp>
+        <p:nvSpPr>
+          <p:cNvPr id="23" name="Text 18"/>
+          <p:cNvSpPr/>
+          <p:nvPr/>
+        </p:nvSpPr>
+        <p:spPr>
+          <a:xfrm>
+            <a:off x="9394857" y="2531864"/>
+            <a:ext cx="155409" cy="343694"/>
+          </a:xfrm>
+          <a:prstGeom prst="rect">
+            <a:avLst/>
+          </a:prstGeom>
+          <a:noFill/>
+          <a:ln/>
+        </p:spPr>
+        <p:txBody>
+          <a:bodyPr wrap="square" lIns="0" tIns="0" rIns="0" bIns="0" rtlCol="0" anchor="t"/>
+          <a:lstStyle/>
+          <a:p>
+            <a:pPr algn="l" indent="0" marL="0">
+              <a:lnSpc>
+                <a:spcPts val="2706"/>
+              </a:lnSpc>
+              <a:spcBef>
+                <a:spcPts val="1067"/>
+              </a:spcBef>
+              <a:buNone/>
+            </a:pPr>
+            <a:r>
+              <a:rPr lang="en-US" sz="1866" dirty="0">
+                <a:solidFill>
+                  <a:srgbClr val="F2F0EB"/>
+                </a:solidFill>
+                <a:latin typeface="ArchivoBlack" pitchFamily="34" charset="0"/>
+                <a:ea typeface="ArchivoBlack" pitchFamily="34" charset="-122"/>
+                <a:cs typeface="ArchivoBlack" pitchFamily="34" charset="-120"/>
+              </a:rPr>
+              <a:t>4</a:t>
+            </a:r>
+            <a:endParaRPr lang="en-US" sz="1866" dirty="0"/>
+          </a:p>
+        </p:txBody>
+      </p:sp>
+      <p:sp>
+        <p:nvSpPr>
+          <p:cNvPr id="24" name="Text 19"/>
+          <p:cNvSpPr/>
+          <p:nvPr/>
+        </p:nvSpPr>
+        <p:spPr>
+          <a:xfrm>
+            <a:off x="9284950" y="2957513"/>
+            <a:ext cx="2037519" cy="687388"/>
+          </a:xfrm>
+          <a:prstGeom prst="rect">
+            <a:avLst/>
+          </a:prstGeom>
+          <a:noFill/>
+          <a:ln/>
+        </p:spPr>
+        <p:txBody>
+          <a:bodyPr wrap="square" lIns="0" tIns="0" rIns="0" bIns="0" rtlCol="0" anchor="t"/>
+          <a:lstStyle/>
+          <a:p>
+            <a:pPr algn="l" indent="0" marL="0">
+              <a:lnSpc>
+                <a:spcPts val="2706"/>
+              </a:lnSpc>
+              <a:spcBef>
+                <a:spcPts val="1067"/>
+              </a:spcBef>
+              <a:buNone/>
+            </a:pPr>
+            <a:r>
+              <a:rPr lang="en-US" sz="1866" dirty="0">
+                <a:solidFill>
+                  <a:srgbClr val="111111"/>
+                </a:solidFill>
+                <a:latin typeface="Inter" pitchFamily="34" charset="0"/>
+                <a:ea typeface="Inter" pitchFamily="34" charset="-122"/>
+                <a:cs typeface="Inter" pitchFamily="34" charset="-120"/>
+              </a:rPr>
+              <a:t>The next change skips the pipeline</a:t>
+            </a:r>
+            <a:endParaRPr lang="en-US" sz="1866" dirty="0"/>
+          </a:p>
+        </p:txBody>
+      </p:sp>
+      <p:pic>
+        <p:nvPicPr>
+          <p:cNvPr id="25" name="Image 3" descr="preencoded.png">    </p:cNvPr>
+          <p:cNvPicPr>
+            <a:picLocks noChangeAspect="1"/>
+          </p:cNvPicPr>
+          <p:nvPr/>
+        </p:nvPicPr>
+        <p:blipFill>
+          <a:blip r:embed="rId7">
+            <a:extLst>
+              <a:ext uri="{96DAC541-7B7A-43D3-8B79-37D633B846F1}">
+                <asvg:svgBlip xmlns:asvg="http://schemas.microsoft.com/office/drawing/2016/SVG/main" r:embed="rId8"/>
+              </a:ext>
+            </a:extLst>
+          </a:blip>
+          <a:stretch>
+            <a:fillRect/>
+          </a:stretch>
+        </p:blipFill>
+        <p:spPr>
+          <a:xfrm>
+            <a:off x="677098" y="4049911"/>
+            <a:ext cx="10834558" cy="406400"/>
+          </a:xfrm>
+          <a:prstGeom prst="rect">
+            <a:avLst/>
+          </a:prstGeom>
+        </p:spPr>
+      </p:pic>
+      <p:sp>
+        <p:nvSpPr>
+          <p:cNvPr id="26" name="Text 20"/>
+          <p:cNvSpPr/>
+          <p:nvPr/>
+        </p:nvSpPr>
+        <p:spPr>
+          <a:xfrm>
+            <a:off x="677098" y="4782344"/>
+            <a:ext cx="10705828" cy="883841"/>
+          </a:xfrm>
+          <a:prstGeom prst="rect">
+            <a:avLst/>
+          </a:prstGeom>
+          <a:noFill/>
+          <a:ln/>
+        </p:spPr>
+        <p:txBody>
+          <a:bodyPr wrap="square" lIns="0" tIns="0" rIns="0" bIns="0" rtlCol="0" anchor="t"/>
+          <a:lstStyle/>
+          <a:p>
+            <a:pPr algn="l" indent="0" marL="0">
+              <a:lnSpc>
+                <a:spcPts val="3480"/>
+              </a:lnSpc>
+              <a:spcBef>
+                <a:spcPts val="2567"/>
+              </a:spcBef>
+              <a:buNone/>
+            </a:pPr>
+            <a:r>
+              <a:rPr lang="en-US" sz="2400" dirty="0">
+                <a:solidFill>
+                  <a:srgbClr val="111111"/>
+                </a:solidFill>
+                <a:latin typeface="Inter" pitchFamily="34" charset="0"/>
+                <a:ea typeface="Inter" pitchFamily="34" charset="-122"/>
+                <a:cs typeface="Inter" pitchFamily="34" charset="-120"/>
+              </a:rPr>
+              <a:t>Nothing here is a tooling failure. The loop closes on itself — </a:t>
+            </a:r>
+            <a:pPr algn="l" indent="0" marL="0">
+              <a:lnSpc>
+                <a:spcPts val="3480"/>
+              </a:lnSpc>
+              <a:spcBef>
+                <a:spcPts val="2567"/>
+              </a:spcBef>
+              <a:buNone/>
+            </a:pPr>
+            <a:r>
+              <a:rPr lang="en-US" sz="2400" b="1" dirty="0">
+                <a:solidFill>
+                  <a:srgbClr val="111111"/>
+                </a:solidFill>
+                <a:latin typeface="Inter" pitchFamily="34" charset="0"/>
+                <a:ea typeface="Inter" pitchFamily="34" charset="-122"/>
+                <a:cs typeface="Inter" pitchFamily="34" charset="-120"/>
+              </a:rPr>
+              <a:t>each lap makes the next change by hand more reasonable than the last.</a:t>
+            </a:r>
+            <a:endParaRPr lang="en-US" sz="2400" dirty="0"/>
+          </a:p>
+        </p:txBody>
+      </p:sp>
+      <p:sp>
+        <p:nvSpPr>
+          <p:cNvPr id="27" name="Text 21"/>
+          <p:cNvSpPr/>
+          <p:nvPr/>
+        </p:nvSpPr>
+        <p:spPr>
+          <a:xfrm>
+            <a:off x="677098" y="5869384"/>
+            <a:ext cx="10834756" cy="50800"/>
+          </a:xfrm>
+          <a:prstGeom prst="rect">
+            <a:avLst/>
+          </a:prstGeom>
+          <a:solidFill>
+            <a:srgbClr val="111111"/>
+          </a:solidFill>
+          <a:ln/>
+        </p:spPr>
+        <p:txBody>
+          <a:bodyPr wrap="square" rtlCol="0" anchor="ctr"/>
+          <a:lstStyle/>
+          <a:p>
+            <a:pPr indent="0" marL="0">
+              <a:buNone/>
+            </a:pPr>
+            <a:endParaRPr lang="en-US" dirty="0"/>
+          </a:p>
+        </p:txBody>
+      </p:sp>
+      <p:sp>
+        <p:nvSpPr>
+          <p:cNvPr id="28" name="Text 22"/>
+          <p:cNvSpPr/>
+          <p:nvPr/>
+        </p:nvSpPr>
+        <p:spPr>
+          <a:xfrm>
+            <a:off x="677098" y="6055519"/>
+            <a:ext cx="2673928" cy="260747"/>
+          </a:xfrm>
+          <a:prstGeom prst="rect">
+            <a:avLst/>
+          </a:prstGeom>
+          <a:noFill/>
+          <a:ln/>
+        </p:spPr>
+        <p:txBody>
+          <a:bodyPr wrap="square" lIns="0" tIns="0" rIns="0" bIns="0" rtlCol="0" anchor="t"/>
+          <a:lstStyle/>
+          <a:p>
+            <a:pPr algn="l" indent="0" marL="0">
+              <a:lnSpc>
+                <a:spcPts val="2053"/>
+              </a:lnSpc>
+              <a:buNone/>
+            </a:pPr>
+            <a:r>
+              <a:rPr lang="en-US" sz="1466" dirty="0">
+                <a:solidFill>
+                  <a:srgbClr val="111111"/>
+                </a:solidFill>
+                <a:latin typeface="Inter" pitchFamily="34" charset="0"/>
+                <a:ea typeface="Inter" pitchFamily="34" charset="-122"/>
+                <a:cs typeface="Inter" pitchFamily="34" charset="-120"/>
+              </a:rPr>
+              <a:t>INFRASTRUCTURE DRIFT</a:t>
+            </a:r>
+            <a:endParaRPr lang="en-US" sz="1466" dirty="0"/>
+          </a:p>
+        </p:txBody>
+      </p:sp>
+      <p:sp>
+        <p:nvSpPr>
+          <p:cNvPr id="29" name="Text 23"/>
+          <p:cNvSpPr/>
+          <p:nvPr/>
+        </p:nvSpPr>
+        <p:spPr>
+          <a:xfrm>
+            <a:off x="9766834" y="6055519"/>
+            <a:ext cx="1779920" cy="260747"/>
+          </a:xfrm>
+          <a:prstGeom prst="rect">
+            <a:avLst/>
+          </a:prstGeom>
+          <a:noFill/>
+          <a:ln/>
+        </p:spPr>
+        <p:txBody>
+          <a:bodyPr wrap="square" lIns="0" tIns="0" rIns="0" bIns="0" rtlCol="0" anchor="t"/>
+          <a:lstStyle/>
+          <a:p>
+            <a:pPr algn="l" indent="0" marL="0">
+              <a:lnSpc>
+                <a:spcPts val="2053"/>
+              </a:lnSpc>
+              <a:buNone/>
+            </a:pPr>
+            <a:r>
+              <a:rPr lang="en-US" sz="1466" dirty="0">
+                <a:solidFill>
+                  <a:srgbClr val="111111"/>
+                </a:solidFill>
+                <a:latin typeface="Inter" pitchFamily="34" charset="0"/>
+                <a:ea typeface="Inter" pitchFamily="34" charset="-122"/>
+                <a:cs typeface="Inter" pitchFamily="34" charset="-120"/>
+              </a:rPr>
+              <a:t>THE DRIFT LOOP</a:t>
+            </a:r>
+            <a:endParaRPr lang="en-US" sz="1466" dirty="0"/>
+          </a:p>
+        </p:txBody>
+      </p:sp>
     </p:spTree>
   </p:cSld>
   <p:clrMapOvr>
@@ -1308,6 +2853,13 @@
 <file path=ppt/slides/slide3.xml><?xml version="1.0" encoding="utf-8"?>
 <p:sld xmlns:a="http://schemas.openxmlformats.org/drawingml/2006/main" xmlns:r="http://schemas.openxmlformats.org/officeDocument/2006/relationships" xmlns:p="http://schemas.openxmlformats.org/presentationml/2006/main">
   <p:cSld name="Slide 3">
+    <p:bg>
+      <p:bgPr>
+        <a:solidFill>
+          <a:srgbClr val="F2F0EB"/>
+        </a:solidFill>
+      </p:bgPr>
+    </p:bg>
     <p:spTree>
       <p:nvGrpSpPr>
         <p:cNvPr id="1" name=""/>
@@ -1322,30 +2874,918 @@
           <a:chExt cx="0" cy="0"/>
         </a:xfrm>
       </p:grpSpPr>
-      <p:pic>
-        <p:nvPicPr>
-          <p:cNvPr id="2" name="Image 0" descr="/tmp/slide-1787840584242-u3cgh16tb1e.png">    </p:cNvPr>
-          <p:cNvPicPr>
-            <a:picLocks noChangeAspect="1"/>
-          </p:cNvPicPr>
-          <p:nvPr/>
-        </p:nvPicPr>
-        <p:blipFill>
-          <a:blip r:embed="rId1"/>
-          <a:stretch>
-            <a:fillRect/>
-          </a:stretch>
-        </p:blipFill>
-        <p:spPr>
-          <a:xfrm>
-            <a:off x="0" y="0"/>
-            <a:ext cx="12188952" cy="6858000"/>
-          </a:xfrm>
-          <a:prstGeom prst="rect">
-            <a:avLst/>
-          </a:prstGeom>
-        </p:spPr>
-      </p:pic>
+      <p:sp>
+        <p:nvSpPr>
+          <p:cNvPr id="2" name="Text 0"/>
+          <p:cNvSpPr/>
+          <p:nvPr/>
+        </p:nvSpPr>
+        <p:spPr>
+          <a:xfrm>
+            <a:off x="677098" y="541734"/>
+            <a:ext cx="3417180" cy="260747"/>
+          </a:xfrm>
+          <a:prstGeom prst="rect">
+            <a:avLst/>
+          </a:prstGeom>
+          <a:noFill/>
+          <a:ln/>
+        </p:spPr>
+        <p:txBody>
+          <a:bodyPr wrap="square" lIns="0" tIns="0" rIns="0" bIns="0" rtlCol="0" anchor="t"/>
+          <a:lstStyle/>
+          <a:p>
+            <a:pPr algn="l" indent="0" marL="0">
+              <a:lnSpc>
+                <a:spcPts val="2053"/>
+              </a:lnSpc>
+              <a:buNone/>
+            </a:pPr>
+            <a:r>
+              <a:rPr lang="en-US" sz="1466" dirty="0">
+                <a:solidFill>
+                  <a:srgbClr val="111111"/>
+                </a:solidFill>
+                <a:latin typeface="Inter" pitchFamily="34" charset="0"/>
+                <a:ea typeface="Inter" pitchFamily="34" charset="-122"/>
+                <a:cs typeface="Inter" pitchFamily="34" charset="-120"/>
+              </a:rPr>
+              <a:t>03 · WHY PEOPLE REACH FOR IT</a:t>
+            </a:r>
+            <a:endParaRPr lang="en-US" sz="1466" dirty="0"/>
+          </a:p>
+        </p:txBody>
+      </p:sp>
+      <p:sp>
+        <p:nvSpPr>
+          <p:cNvPr id="3" name="Text 1"/>
+          <p:cNvSpPr/>
+          <p:nvPr/>
+        </p:nvSpPr>
+        <p:spPr>
+          <a:xfrm>
+            <a:off x="10785358" y="541734"/>
+            <a:ext cx="741026" cy="260747"/>
+          </a:xfrm>
+          <a:prstGeom prst="rect">
+            <a:avLst/>
+          </a:prstGeom>
+          <a:noFill/>
+          <a:ln/>
+        </p:spPr>
+        <p:txBody>
+          <a:bodyPr wrap="square" lIns="0" tIns="0" rIns="0" bIns="0" rtlCol="0" anchor="t"/>
+          <a:lstStyle/>
+          <a:p>
+            <a:pPr algn="l" indent="0" marL="0">
+              <a:lnSpc>
+                <a:spcPts val="2053"/>
+              </a:lnSpc>
+              <a:buNone/>
+            </a:pPr>
+            <a:r>
+              <a:rPr lang="en-US" sz="1466" dirty="0">
+                <a:solidFill>
+                  <a:srgbClr val="111111"/>
+                </a:solidFill>
+                <a:latin typeface="Inter" pitchFamily="34" charset="0"/>
+                <a:ea typeface="Inter" pitchFamily="34" charset="-122"/>
+                <a:cs typeface="Inter" pitchFamily="34" charset="-120"/>
+              </a:rPr>
+              <a:t>03 / 05</a:t>
+            </a:r>
+            <a:endParaRPr lang="en-US" sz="1466" dirty="0"/>
+          </a:p>
+        </p:txBody>
+      </p:sp>
+      <p:sp>
+        <p:nvSpPr>
+          <p:cNvPr id="4" name="Text 2"/>
+          <p:cNvSpPr/>
+          <p:nvPr/>
+        </p:nvSpPr>
+        <p:spPr>
+          <a:xfrm>
+            <a:off x="677098" y="937816"/>
+            <a:ext cx="10834756" cy="50800"/>
+          </a:xfrm>
+          <a:prstGeom prst="rect">
+            <a:avLst/>
+          </a:prstGeom>
+          <a:solidFill>
+            <a:srgbClr val="111111"/>
+          </a:solidFill>
+          <a:ln/>
+        </p:spPr>
+        <p:txBody>
+          <a:bodyPr wrap="square" rtlCol="0" anchor="ctr"/>
+          <a:lstStyle/>
+          <a:p>
+            <a:pPr indent="0" marL="0">
+              <a:buNone/>
+            </a:pPr>
+            <a:endParaRPr lang="en-US" dirty="0"/>
+          </a:p>
+        </p:txBody>
+      </p:sp>
+      <p:sp>
+        <p:nvSpPr>
+          <p:cNvPr id="5" name="Text 3"/>
+          <p:cNvSpPr/>
+          <p:nvPr/>
+        </p:nvSpPr>
+        <p:spPr>
+          <a:xfrm>
+            <a:off x="677098" y="1259483"/>
+            <a:ext cx="11051451" cy="690761"/>
+          </a:xfrm>
+          <a:prstGeom prst="rect">
+            <a:avLst/>
+          </a:prstGeom>
+          <a:noFill/>
+          <a:ln/>
+        </p:spPr>
+        <p:txBody>
+          <a:bodyPr wrap="square" lIns="0" tIns="0" rIns="0" bIns="0" rtlCol="0" anchor="t"/>
+          <a:lstStyle/>
+          <a:p>
+            <a:pPr algn="l" indent="0" marL="0">
+              <a:lnSpc>
+                <a:spcPts val="5439"/>
+              </a:lnSpc>
+              <a:spcAft>
+                <a:spcPts val="2133"/>
+              </a:spcAft>
+              <a:buNone/>
+            </a:pPr>
+            <a:r>
+              <a:rPr lang="en-US" sz="4533" b="1" dirty="0">
+                <a:solidFill>
+                  <a:srgbClr val="111111"/>
+                </a:solidFill>
+                <a:latin typeface="ArchivoBlack" pitchFamily="34" charset="0"/>
+                <a:ea typeface="ArchivoBlack" pitchFamily="34" charset="-122"/>
+                <a:cs typeface="ArchivoBlack" pitchFamily="34" charset="-120"/>
+              </a:rPr>
+              <a:t>Why the console keeps winning</a:t>
+            </a:r>
+            <a:endParaRPr lang="en-US" sz="4533" dirty="0"/>
+          </a:p>
+        </p:txBody>
+      </p:sp>
+      <p:sp>
+        <p:nvSpPr>
+          <p:cNvPr id="6" name="Text 4"/>
+          <p:cNvSpPr/>
+          <p:nvPr/>
+        </p:nvSpPr>
+        <p:spPr>
+          <a:xfrm>
+            <a:off x="677098" y="2221111"/>
+            <a:ext cx="372374" cy="372467"/>
+          </a:xfrm>
+          <a:prstGeom prst="rect">
+            <a:avLst/>
+          </a:prstGeom>
+          <a:solidFill>
+            <a:srgbClr val="111111"/>
+          </a:solidFill>
+          <a:ln/>
+        </p:spPr>
+        <p:txBody>
+          <a:bodyPr wrap="square" rtlCol="0" anchor="ctr"/>
+          <a:lstStyle/>
+          <a:p>
+            <a:pPr indent="0" marL="0">
+              <a:buNone/>
+            </a:pPr>
+            <a:endParaRPr lang="en-US" dirty="0"/>
+          </a:p>
+        </p:txBody>
+      </p:sp>
+      <p:sp>
+        <p:nvSpPr>
+          <p:cNvPr id="7" name="Text 5"/>
+          <p:cNvSpPr/>
+          <p:nvPr/>
+        </p:nvSpPr>
+        <p:spPr>
+          <a:xfrm>
+            <a:off x="793353" y="2265164"/>
+            <a:ext cx="142458" cy="284361"/>
+          </a:xfrm>
+          <a:prstGeom prst="rect">
+            <a:avLst/>
+          </a:prstGeom>
+          <a:noFill/>
+          <a:ln/>
+        </p:spPr>
+        <p:txBody>
+          <a:bodyPr wrap="square" lIns="0" tIns="0" rIns="0" bIns="0" rtlCol="0" anchor="t"/>
+          <a:lstStyle/>
+          <a:p>
+            <a:pPr algn="l" indent="0" marL="0">
+              <a:lnSpc>
+                <a:spcPts val="2240"/>
+              </a:lnSpc>
+              <a:buNone/>
+            </a:pPr>
+            <a:r>
+              <a:rPr lang="en-US" sz="1600" b="1" dirty="0">
+                <a:solidFill>
+                  <a:srgbClr val="F2F0EB"/>
+                </a:solidFill>
+                <a:latin typeface="ArchivoBlack" pitchFamily="34" charset="0"/>
+                <a:ea typeface="ArchivoBlack" pitchFamily="34" charset="-122"/>
+                <a:cs typeface="ArchivoBlack" pitchFamily="34" charset="-120"/>
+              </a:rPr>
+              <a:t>1</a:t>
+            </a:r>
+            <a:endParaRPr lang="en-US" sz="1600" dirty="0"/>
+          </a:p>
+        </p:txBody>
+      </p:sp>
+      <p:sp>
+        <p:nvSpPr>
+          <p:cNvPr id="8" name="Text 6"/>
+          <p:cNvSpPr/>
+          <p:nvPr/>
+        </p:nvSpPr>
+        <p:spPr>
+          <a:xfrm>
+            <a:off x="677098" y="2762845"/>
+            <a:ext cx="3453401" cy="352028"/>
+          </a:xfrm>
+          <a:prstGeom prst="rect">
+            <a:avLst/>
+          </a:prstGeom>
+          <a:noFill/>
+          <a:ln/>
+        </p:spPr>
+        <p:txBody>
+          <a:bodyPr wrap="square" lIns="0" tIns="0" rIns="0" bIns="0" rtlCol="0" anchor="t"/>
+          <a:lstStyle/>
+          <a:p>
+            <a:pPr algn="l" indent="0" marL="0">
+              <a:lnSpc>
+                <a:spcPts val="2773"/>
+              </a:lnSpc>
+              <a:spcBef>
+                <a:spcPts val="1333"/>
+              </a:spcBef>
+              <a:buNone/>
+            </a:pPr>
+            <a:r>
+              <a:rPr lang="en-US" sz="2133" b="1" dirty="0">
+                <a:solidFill>
+                  <a:srgbClr val="111111"/>
+                </a:solidFill>
+                <a:latin typeface="Inter" pitchFamily="34" charset="0"/>
+                <a:ea typeface="Inter" pitchFamily="34" charset="-122"/>
+                <a:cs typeface="Inter" pitchFamily="34" charset="-120"/>
+              </a:rPr>
+              <a:t>Faster during an incident</a:t>
+            </a:r>
+            <a:endParaRPr lang="en-US" sz="2133" dirty="0"/>
+          </a:p>
+        </p:txBody>
+      </p:sp>
+      <p:sp>
+        <p:nvSpPr>
+          <p:cNvPr id="9" name="Text 7"/>
+          <p:cNvSpPr/>
+          <p:nvPr/>
+        </p:nvSpPr>
+        <p:spPr>
+          <a:xfrm>
+            <a:off x="677098" y="3284141"/>
+            <a:ext cx="3385688" cy="50800"/>
+          </a:xfrm>
+          <a:prstGeom prst="rect">
+            <a:avLst/>
+          </a:prstGeom>
+          <a:solidFill>
+            <a:srgbClr val="FF4A1C"/>
+          </a:solidFill>
+          <a:ln/>
+        </p:spPr>
+        <p:txBody>
+          <a:bodyPr wrap="square" rtlCol="0" anchor="ctr"/>
+          <a:lstStyle/>
+          <a:p>
+            <a:pPr indent="0" marL="0">
+              <a:buNone/>
+            </a:pPr>
+            <a:endParaRPr lang="en-US" dirty="0"/>
+          </a:p>
+        </p:txBody>
+      </p:sp>
+      <p:sp>
+        <p:nvSpPr>
+          <p:cNvPr id="10" name="Text 8"/>
+          <p:cNvSpPr/>
+          <p:nvPr/>
+        </p:nvSpPr>
+        <p:spPr>
+          <a:xfrm>
+            <a:off x="677098" y="3504208"/>
+            <a:ext cx="3453401" cy="1031081"/>
+          </a:xfrm>
+          <a:prstGeom prst="rect">
+            <a:avLst/>
+          </a:prstGeom>
+          <a:noFill/>
+          <a:ln/>
+        </p:spPr>
+        <p:txBody>
+          <a:bodyPr wrap="square" lIns="0" tIns="0" rIns="0" bIns="0" rtlCol="0" anchor="t"/>
+          <a:lstStyle/>
+          <a:p>
+            <a:pPr algn="l" indent="0" marL="0">
+              <a:lnSpc>
+                <a:spcPts val="2706"/>
+              </a:lnSpc>
+              <a:buNone/>
+            </a:pPr>
+            <a:r>
+              <a:rPr lang="en-US" sz="1866" dirty="0">
+                <a:solidFill>
+                  <a:srgbClr val="111111"/>
+                </a:solidFill>
+                <a:latin typeface="Inter" pitchFamily="34" charset="0"/>
+                <a:ea typeface="Inter" pitchFamily="34" charset="-122"/>
+                <a:cs typeface="Inter" pitchFamily="34" charset="-120"/>
+              </a:rPr>
+              <a:t>The pipeline answers in minutes. The pager answers in seconds.</a:t>
+            </a:r>
+            <a:endParaRPr lang="en-US" sz="1866" dirty="0"/>
+          </a:p>
+        </p:txBody>
+      </p:sp>
+      <p:sp>
+        <p:nvSpPr>
+          <p:cNvPr id="11" name="Text 9"/>
+          <p:cNvSpPr/>
+          <p:nvPr/>
+        </p:nvSpPr>
+        <p:spPr>
+          <a:xfrm>
+            <a:off x="4401235" y="2221111"/>
+            <a:ext cx="372374" cy="372467"/>
+          </a:xfrm>
+          <a:prstGeom prst="rect">
+            <a:avLst/>
+          </a:prstGeom>
+          <a:solidFill>
+            <a:srgbClr val="111111"/>
+          </a:solidFill>
+          <a:ln/>
+        </p:spPr>
+        <p:txBody>
+          <a:bodyPr wrap="square" rtlCol="0" anchor="ctr"/>
+          <a:lstStyle/>
+          <a:p>
+            <a:pPr indent="0" marL="0">
+              <a:buNone/>
+            </a:pPr>
+            <a:endParaRPr lang="en-US" dirty="0"/>
+          </a:p>
+        </p:txBody>
+      </p:sp>
+      <p:sp>
+        <p:nvSpPr>
+          <p:cNvPr id="12" name="Text 10"/>
+          <p:cNvSpPr/>
+          <p:nvPr/>
+        </p:nvSpPr>
+        <p:spPr>
+          <a:xfrm>
+            <a:off x="4517491" y="2265164"/>
+            <a:ext cx="142458" cy="284361"/>
+          </a:xfrm>
+          <a:prstGeom prst="rect">
+            <a:avLst/>
+          </a:prstGeom>
+          <a:noFill/>
+          <a:ln/>
+        </p:spPr>
+        <p:txBody>
+          <a:bodyPr wrap="square" lIns="0" tIns="0" rIns="0" bIns="0" rtlCol="0" anchor="t"/>
+          <a:lstStyle/>
+          <a:p>
+            <a:pPr algn="l" indent="0" marL="0">
+              <a:lnSpc>
+                <a:spcPts val="2240"/>
+              </a:lnSpc>
+              <a:buNone/>
+            </a:pPr>
+            <a:r>
+              <a:rPr lang="en-US" sz="1600" b="1" dirty="0">
+                <a:solidFill>
+                  <a:srgbClr val="F2F0EB"/>
+                </a:solidFill>
+                <a:latin typeface="ArchivoBlack" pitchFamily="34" charset="0"/>
+                <a:ea typeface="ArchivoBlack" pitchFamily="34" charset="-122"/>
+                <a:cs typeface="ArchivoBlack" pitchFamily="34" charset="-120"/>
+              </a:rPr>
+              <a:t>2</a:t>
+            </a:r>
+            <a:endParaRPr lang="en-US" sz="1600" dirty="0"/>
+          </a:p>
+        </p:txBody>
+      </p:sp>
+      <p:sp>
+        <p:nvSpPr>
+          <p:cNvPr id="13" name="Text 11"/>
+          <p:cNvSpPr/>
+          <p:nvPr/>
+        </p:nvSpPr>
+        <p:spPr>
+          <a:xfrm>
+            <a:off x="4401235" y="2762845"/>
+            <a:ext cx="3453401" cy="352028"/>
+          </a:xfrm>
+          <a:prstGeom prst="rect">
+            <a:avLst/>
+          </a:prstGeom>
+          <a:noFill/>
+          <a:ln/>
+        </p:spPr>
+        <p:txBody>
+          <a:bodyPr wrap="square" lIns="0" tIns="0" rIns="0" bIns="0" rtlCol="0" anchor="t"/>
+          <a:lstStyle/>
+          <a:p>
+            <a:pPr algn="l" indent="0" marL="0">
+              <a:lnSpc>
+                <a:spcPts val="2773"/>
+              </a:lnSpc>
+              <a:spcBef>
+                <a:spcPts val="1333"/>
+              </a:spcBef>
+              <a:buNone/>
+            </a:pPr>
+            <a:r>
+              <a:rPr lang="en-US" sz="2133" b="1" dirty="0">
+                <a:solidFill>
+                  <a:srgbClr val="111111"/>
+                </a:solidFill>
+                <a:latin typeface="Inter" pitchFamily="34" charset="0"/>
+                <a:ea typeface="Inter" pitchFamily="34" charset="-122"/>
+                <a:cs typeface="Inter" pitchFamily="34" charset="-120"/>
+              </a:rPr>
+              <a:t>The pipeline is blocked</a:t>
+            </a:r>
+            <a:endParaRPr lang="en-US" sz="2133" dirty="0"/>
+          </a:p>
+        </p:txBody>
+      </p:sp>
+      <p:sp>
+        <p:nvSpPr>
+          <p:cNvPr id="14" name="Text 12"/>
+          <p:cNvSpPr/>
+          <p:nvPr/>
+        </p:nvSpPr>
+        <p:spPr>
+          <a:xfrm>
+            <a:off x="4401235" y="3284141"/>
+            <a:ext cx="3385688" cy="50800"/>
+          </a:xfrm>
+          <a:prstGeom prst="rect">
+            <a:avLst/>
+          </a:prstGeom>
+          <a:solidFill>
+            <a:srgbClr val="FF4A1C"/>
+          </a:solidFill>
+          <a:ln/>
+        </p:spPr>
+        <p:txBody>
+          <a:bodyPr wrap="square" rtlCol="0" anchor="ctr"/>
+          <a:lstStyle/>
+          <a:p>
+            <a:pPr indent="0" marL="0">
+              <a:buNone/>
+            </a:pPr>
+            <a:endParaRPr lang="en-US" dirty="0"/>
+          </a:p>
+        </p:txBody>
+      </p:sp>
+      <p:sp>
+        <p:nvSpPr>
+          <p:cNvPr id="15" name="Text 13"/>
+          <p:cNvSpPr/>
+          <p:nvPr/>
+        </p:nvSpPr>
+        <p:spPr>
+          <a:xfrm>
+            <a:off x="4401235" y="3504208"/>
+            <a:ext cx="3453401" cy="1031081"/>
+          </a:xfrm>
+          <a:prstGeom prst="rect">
+            <a:avLst/>
+          </a:prstGeom>
+          <a:noFill/>
+          <a:ln/>
+        </p:spPr>
+        <p:txBody>
+          <a:bodyPr wrap="square" lIns="0" tIns="0" rIns="0" bIns="0" rtlCol="0" anchor="t"/>
+          <a:lstStyle/>
+          <a:p>
+            <a:pPr algn="l" indent="0" marL="0">
+              <a:lnSpc>
+                <a:spcPts val="2706"/>
+              </a:lnSpc>
+              <a:buNone/>
+            </a:pPr>
+            <a:r>
+              <a:rPr lang="en-US" sz="1866" dirty="0">
+                <a:solidFill>
+                  <a:srgbClr val="111111"/>
+                </a:solidFill>
+                <a:latin typeface="Inter" pitchFamily="34" charset="0"/>
+                <a:ea typeface="Inter" pitchFamily="34" charset="-122"/>
+                <a:cs typeface="Inter" pitchFamily="34" charset="-120"/>
+              </a:rPr>
+              <a:t>Queued behind unrelated changes, waiting on a sleeping reviewer.</a:t>
+            </a:r>
+            <a:endParaRPr lang="en-US" sz="1866" dirty="0"/>
+          </a:p>
+        </p:txBody>
+      </p:sp>
+      <p:sp>
+        <p:nvSpPr>
+          <p:cNvPr id="16" name="Text 14"/>
+          <p:cNvSpPr/>
+          <p:nvPr/>
+        </p:nvSpPr>
+        <p:spPr>
+          <a:xfrm>
+            <a:off x="8125373" y="2221111"/>
+            <a:ext cx="372374" cy="372467"/>
+          </a:xfrm>
+          <a:prstGeom prst="rect">
+            <a:avLst/>
+          </a:prstGeom>
+          <a:solidFill>
+            <a:srgbClr val="111111"/>
+          </a:solidFill>
+          <a:ln/>
+        </p:spPr>
+        <p:txBody>
+          <a:bodyPr wrap="square" rtlCol="0" anchor="ctr"/>
+          <a:lstStyle/>
+          <a:p>
+            <a:pPr indent="0" marL="0">
+              <a:buNone/>
+            </a:pPr>
+            <a:endParaRPr lang="en-US" dirty="0"/>
+          </a:p>
+        </p:txBody>
+      </p:sp>
+      <p:sp>
+        <p:nvSpPr>
+          <p:cNvPr id="17" name="Text 15"/>
+          <p:cNvSpPr/>
+          <p:nvPr/>
+        </p:nvSpPr>
+        <p:spPr>
+          <a:xfrm>
+            <a:off x="8241628" y="2265164"/>
+            <a:ext cx="142458" cy="284361"/>
+          </a:xfrm>
+          <a:prstGeom prst="rect">
+            <a:avLst/>
+          </a:prstGeom>
+          <a:noFill/>
+          <a:ln/>
+        </p:spPr>
+        <p:txBody>
+          <a:bodyPr wrap="square" lIns="0" tIns="0" rIns="0" bIns="0" rtlCol="0" anchor="t"/>
+          <a:lstStyle/>
+          <a:p>
+            <a:pPr algn="l" indent="0" marL="0">
+              <a:lnSpc>
+                <a:spcPts val="2240"/>
+              </a:lnSpc>
+              <a:buNone/>
+            </a:pPr>
+            <a:r>
+              <a:rPr lang="en-US" sz="1600" b="1" dirty="0">
+                <a:solidFill>
+                  <a:srgbClr val="F2F0EB"/>
+                </a:solidFill>
+                <a:latin typeface="ArchivoBlack" pitchFamily="34" charset="0"/>
+                <a:ea typeface="ArchivoBlack" pitchFamily="34" charset="-122"/>
+                <a:cs typeface="ArchivoBlack" pitchFamily="34" charset="-120"/>
+              </a:rPr>
+              <a:t>3</a:t>
+            </a:r>
+            <a:endParaRPr lang="en-US" sz="1600" dirty="0"/>
+          </a:p>
+        </p:txBody>
+      </p:sp>
+      <p:sp>
+        <p:nvSpPr>
+          <p:cNvPr id="18" name="Text 16"/>
+          <p:cNvSpPr/>
+          <p:nvPr/>
+        </p:nvSpPr>
+        <p:spPr>
+          <a:xfrm>
+            <a:off x="8125373" y="2762845"/>
+            <a:ext cx="3453401" cy="352028"/>
+          </a:xfrm>
+          <a:prstGeom prst="rect">
+            <a:avLst/>
+          </a:prstGeom>
+          <a:noFill/>
+          <a:ln/>
+        </p:spPr>
+        <p:txBody>
+          <a:bodyPr wrap="square" lIns="0" tIns="0" rIns="0" bIns="0" rtlCol="0" anchor="t"/>
+          <a:lstStyle/>
+          <a:p>
+            <a:pPr algn="l" indent="0" marL="0">
+              <a:lnSpc>
+                <a:spcPts val="2773"/>
+              </a:lnSpc>
+              <a:spcBef>
+                <a:spcPts val="1333"/>
+              </a:spcBef>
+              <a:buNone/>
+            </a:pPr>
+            <a:r>
+              <a:rPr lang="en-US" sz="2133" b="1" dirty="0">
+                <a:solidFill>
+                  <a:srgbClr val="111111"/>
+                </a:solidFill>
+                <a:latin typeface="Inter" pitchFamily="34" charset="0"/>
+                <a:ea typeface="Inter" pitchFamily="34" charset="-122"/>
+                <a:cs typeface="Inter" pitchFamily="34" charset="-120"/>
+              </a:rPr>
+              <a:t>The module has no field</a:t>
+            </a:r>
+            <a:endParaRPr lang="en-US" sz="2133" dirty="0"/>
+          </a:p>
+        </p:txBody>
+      </p:sp>
+      <p:sp>
+        <p:nvSpPr>
+          <p:cNvPr id="19" name="Text 17"/>
+          <p:cNvSpPr/>
+          <p:nvPr/>
+        </p:nvSpPr>
+        <p:spPr>
+          <a:xfrm>
+            <a:off x="8125373" y="3284141"/>
+            <a:ext cx="3385688" cy="50800"/>
+          </a:xfrm>
+          <a:prstGeom prst="rect">
+            <a:avLst/>
+          </a:prstGeom>
+          <a:solidFill>
+            <a:srgbClr val="FF4A1C"/>
+          </a:solidFill>
+          <a:ln/>
+        </p:spPr>
+        <p:txBody>
+          <a:bodyPr wrap="square" rtlCol="0" anchor="ctr"/>
+          <a:lstStyle/>
+          <a:p>
+            <a:pPr indent="0" marL="0">
+              <a:buNone/>
+            </a:pPr>
+            <a:endParaRPr lang="en-US" dirty="0"/>
+          </a:p>
+        </p:txBody>
+      </p:sp>
+      <p:sp>
+        <p:nvSpPr>
+          <p:cNvPr id="20" name="Text 18"/>
+          <p:cNvSpPr/>
+          <p:nvPr/>
+        </p:nvSpPr>
+        <p:spPr>
+          <a:xfrm>
+            <a:off x="8125373" y="3504208"/>
+            <a:ext cx="3453401" cy="1031081"/>
+          </a:xfrm>
+          <a:prstGeom prst="rect">
+            <a:avLst/>
+          </a:prstGeom>
+          <a:noFill/>
+          <a:ln/>
+        </p:spPr>
+        <p:txBody>
+          <a:bodyPr wrap="square" lIns="0" tIns="0" rIns="0" bIns="0" rtlCol="0" anchor="t"/>
+          <a:lstStyle/>
+          <a:p>
+            <a:pPr algn="l" indent="0" marL="0">
+              <a:lnSpc>
+                <a:spcPts val="2706"/>
+              </a:lnSpc>
+              <a:buNone/>
+            </a:pPr>
+            <a:r>
+              <a:rPr lang="en-US" sz="1866" dirty="0">
+                <a:solidFill>
+                  <a:srgbClr val="111111"/>
+                </a:solidFill>
+                <a:latin typeface="Inter" pitchFamily="34" charset="0"/>
+                <a:ea typeface="Inter" pitchFamily="34" charset="-122"/>
+                <a:cs typeface="Inter" pitchFamily="34" charset="-120"/>
+              </a:rPr>
+              <a:t>The abstraction is behind the provider. There is no code to write.</a:t>
+            </a:r>
+            <a:endParaRPr lang="en-US" sz="1866" dirty="0"/>
+          </a:p>
+        </p:txBody>
+      </p:sp>
+      <p:sp>
+        <p:nvSpPr>
+          <p:cNvPr id="21" name="Text 19"/>
+          <p:cNvSpPr/>
+          <p:nvPr/>
+        </p:nvSpPr>
+        <p:spPr>
+          <a:xfrm>
+            <a:off x="677098" y="4731742"/>
+            <a:ext cx="10834756" cy="934442"/>
+          </a:xfrm>
+          <a:prstGeom prst="rect">
+            <a:avLst/>
+          </a:prstGeom>
+          <a:solidFill>
+            <a:srgbClr val="111111"/>
+          </a:solidFill>
+          <a:ln/>
+        </p:spPr>
+        <p:txBody>
+          <a:bodyPr wrap="square" rtlCol="0" anchor="ctr"/>
+          <a:lstStyle/>
+          <a:p>
+            <a:pPr indent="0" marL="0">
+              <a:buNone/>
+            </a:pPr>
+            <a:endParaRPr lang="en-US" dirty="0"/>
+          </a:p>
+        </p:txBody>
+      </p:sp>
+      <p:sp>
+        <p:nvSpPr>
+          <p:cNvPr id="22" name="Text 20"/>
+          <p:cNvSpPr/>
+          <p:nvPr/>
+        </p:nvSpPr>
+        <p:spPr>
+          <a:xfrm>
+            <a:off x="1015548" y="5002609"/>
+            <a:ext cx="10361014" cy="392708"/>
+          </a:xfrm>
+          <a:prstGeom prst="rect">
+            <a:avLst/>
+          </a:prstGeom>
+          <a:noFill/>
+          <a:ln/>
+        </p:spPr>
+        <p:txBody>
+          <a:bodyPr wrap="square" lIns="0" tIns="0" rIns="0" bIns="0" rtlCol="0" anchor="t"/>
+          <a:lstStyle/>
+          <a:p>
+            <a:pPr algn="l" indent="0" marL="0">
+              <a:lnSpc>
+                <a:spcPts val="3093"/>
+              </a:lnSpc>
+              <a:buNone/>
+            </a:pPr>
+            <a:r>
+              <a:rPr lang="en-US" sz="2133" dirty="0">
+                <a:solidFill>
+                  <a:srgbClr val="F2F0EB"/>
+                </a:solidFill>
+                <a:latin typeface="Inter" pitchFamily="34" charset="0"/>
+                <a:ea typeface="Inter" pitchFamily="34" charset="-122"/>
+                <a:cs typeface="Inter" pitchFamily="34" charset="-120"/>
+              </a:rPr>
+              <a:t>Every one of these is a gap in the paved path, not a failure of discipline.</a:t>
+            </a:r>
+            <a:endParaRPr lang="en-US" sz="2133" dirty="0"/>
+          </a:p>
+        </p:txBody>
+      </p:sp>
+      <p:sp>
+        <p:nvSpPr>
+          <p:cNvPr id="23" name="Text 21"/>
+          <p:cNvSpPr/>
+          <p:nvPr/>
+        </p:nvSpPr>
+        <p:spPr>
+          <a:xfrm>
+            <a:off x="677098" y="5869384"/>
+            <a:ext cx="10834756" cy="50800"/>
+          </a:xfrm>
+          <a:prstGeom prst="rect">
+            <a:avLst/>
+          </a:prstGeom>
+          <a:solidFill>
+            <a:srgbClr val="111111"/>
+          </a:solidFill>
+          <a:ln/>
+        </p:spPr>
+        <p:txBody>
+          <a:bodyPr wrap="square" rtlCol="0" anchor="ctr"/>
+          <a:lstStyle/>
+          <a:p>
+            <a:pPr indent="0" marL="0">
+              <a:buNone/>
+            </a:pPr>
+            <a:endParaRPr lang="en-US" dirty="0"/>
+          </a:p>
+        </p:txBody>
+      </p:sp>
+      <p:sp>
+        <p:nvSpPr>
+          <p:cNvPr id="24" name="Text 22"/>
+          <p:cNvSpPr/>
+          <p:nvPr/>
+        </p:nvSpPr>
+        <p:spPr>
+          <a:xfrm>
+            <a:off x="677098" y="6055519"/>
+            <a:ext cx="2673928" cy="260747"/>
+          </a:xfrm>
+          <a:prstGeom prst="rect">
+            <a:avLst/>
+          </a:prstGeom>
+          <a:noFill/>
+          <a:ln/>
+        </p:spPr>
+        <p:txBody>
+          <a:bodyPr wrap="square" lIns="0" tIns="0" rIns="0" bIns="0" rtlCol="0" anchor="t"/>
+          <a:lstStyle/>
+          <a:p>
+            <a:pPr algn="l" indent="0" marL="0">
+              <a:lnSpc>
+                <a:spcPts val="2053"/>
+              </a:lnSpc>
+              <a:buNone/>
+            </a:pPr>
+            <a:r>
+              <a:rPr lang="en-US" sz="1466" dirty="0">
+                <a:solidFill>
+                  <a:srgbClr val="111111"/>
+                </a:solidFill>
+                <a:latin typeface="Inter" pitchFamily="34" charset="0"/>
+                <a:ea typeface="Inter" pitchFamily="34" charset="-122"/>
+                <a:cs typeface="Inter" pitchFamily="34" charset="-120"/>
+              </a:rPr>
+              <a:t>INFRASTRUCTURE DRIFT</a:t>
+            </a:r>
+            <a:endParaRPr lang="en-US" sz="1466" dirty="0"/>
+          </a:p>
+        </p:txBody>
+      </p:sp>
+      <p:sp>
+        <p:nvSpPr>
+          <p:cNvPr id="25" name="Text 23"/>
+          <p:cNvSpPr/>
+          <p:nvPr/>
+        </p:nvSpPr>
+        <p:spPr>
+          <a:xfrm>
+            <a:off x="8216830" y="6055519"/>
+            <a:ext cx="3360925" cy="260747"/>
+          </a:xfrm>
+          <a:prstGeom prst="rect">
+            <a:avLst/>
+          </a:prstGeom>
+          <a:noFill/>
+          <a:ln/>
+        </p:spPr>
+        <p:txBody>
+          <a:bodyPr wrap="square" lIns="0" tIns="0" rIns="0" bIns="0" rtlCol="0" anchor="t"/>
+          <a:lstStyle/>
+          <a:p>
+            <a:pPr algn="l" indent="0" marL="0">
+              <a:lnSpc>
+                <a:spcPts val="2053"/>
+              </a:lnSpc>
+              <a:buNone/>
+            </a:pPr>
+            <a:r>
+              <a:rPr lang="en-US" sz="1466" dirty="0">
+                <a:solidFill>
+                  <a:srgbClr val="111111"/>
+                </a:solidFill>
+                <a:latin typeface="Inter" pitchFamily="34" charset="0"/>
+                <a:ea typeface="Inter" pitchFamily="34" charset="-122"/>
+                <a:cs typeface="Inter" pitchFamily="34" charset="-120"/>
+              </a:rPr>
+              <a:t>TAKE THE REASONS SERIOUSLY</a:t>
+            </a:r>
+            <a:endParaRPr lang="en-US" sz="1466" dirty="0"/>
+          </a:p>
+        </p:txBody>
+      </p:sp>
     </p:spTree>
   </p:cSld>
   <p:clrMapOvr>
@@ -1357,6 +3797,13 @@
 <file path=ppt/slides/slide4.xml><?xml version="1.0" encoding="utf-8"?>
 <p:sld xmlns:a="http://schemas.openxmlformats.org/drawingml/2006/main" xmlns:r="http://schemas.openxmlformats.org/officeDocument/2006/relationships" xmlns:p="http://schemas.openxmlformats.org/presentationml/2006/main">
   <p:cSld name="Slide 4">
+    <p:bg>
+      <p:bgPr>
+        <a:solidFill>
+          <a:srgbClr val="F2F0EB"/>
+        </a:solidFill>
+      </p:bgPr>
+    </p:bg>
     <p:spTree>
       <p:nvGrpSpPr>
         <p:cNvPr id="1" name=""/>
@@ -1371,30 +3818,912 @@
           <a:chExt cx="0" cy="0"/>
         </a:xfrm>
       </p:grpSpPr>
-      <p:pic>
-        <p:nvPicPr>
-          <p:cNvPr id="2" name="Image 0" descr="/tmp/slide-1787840584559-fonbnzjog8s.png">    </p:cNvPr>
-          <p:cNvPicPr>
-            <a:picLocks noChangeAspect="1"/>
-          </p:cNvPicPr>
-          <p:nvPr/>
-        </p:nvPicPr>
-        <p:blipFill>
-          <a:blip r:embed="rId1"/>
-          <a:stretch>
-            <a:fillRect/>
-          </a:stretch>
-        </p:blipFill>
-        <p:spPr>
-          <a:xfrm>
-            <a:off x="0" y="0"/>
-            <a:ext cx="12188952" cy="6858000"/>
-          </a:xfrm>
-          <a:prstGeom prst="rect">
-            <a:avLst/>
-          </a:prstGeom>
-        </p:spPr>
-      </p:pic>
+      <p:sp>
+        <p:nvSpPr>
+          <p:cNvPr id="2" name="Text 0"/>
+          <p:cNvSpPr/>
+          <p:nvPr/>
+        </p:nvSpPr>
+        <p:spPr>
+          <a:xfrm>
+            <a:off x="677098" y="541734"/>
+            <a:ext cx="3365377" cy="260747"/>
+          </a:xfrm>
+          <a:prstGeom prst="rect">
+            <a:avLst/>
+          </a:prstGeom>
+          <a:noFill/>
+          <a:ln/>
+        </p:spPr>
+        <p:txBody>
+          <a:bodyPr wrap="square" lIns="0" tIns="0" rIns="0" bIns="0" rtlCol="0" anchor="t"/>
+          <a:lstStyle/>
+          <a:p>
+            <a:pPr algn="l" indent="0" marL="0">
+              <a:lnSpc>
+                <a:spcPts val="2053"/>
+              </a:lnSpc>
+              <a:buNone/>
+            </a:pPr>
+            <a:r>
+              <a:rPr lang="en-US" sz="1466" dirty="0">
+                <a:solidFill>
+                  <a:srgbClr val="111111"/>
+                </a:solidFill>
+                <a:latin typeface="Inter" pitchFamily="34" charset="0"/>
+                <a:ea typeface="Inter" pitchFamily="34" charset="-122"/>
+                <a:cs typeface="Inter" pitchFamily="34" charset="-120"/>
+              </a:rPr>
+              <a:t>04 · ONE PATH, THE ONLY PATH</a:t>
+            </a:r>
+            <a:endParaRPr lang="en-US" sz="1466" dirty="0"/>
+          </a:p>
+        </p:txBody>
+      </p:sp>
+      <p:sp>
+        <p:nvSpPr>
+          <p:cNvPr id="3" name="Text 1"/>
+          <p:cNvSpPr/>
+          <p:nvPr/>
+        </p:nvSpPr>
+        <p:spPr>
+          <a:xfrm>
+            <a:off x="10772661" y="541734"/>
+            <a:ext cx="753977" cy="260747"/>
+          </a:xfrm>
+          <a:prstGeom prst="rect">
+            <a:avLst/>
+          </a:prstGeom>
+          <a:noFill/>
+          <a:ln/>
+        </p:spPr>
+        <p:txBody>
+          <a:bodyPr wrap="square" lIns="0" tIns="0" rIns="0" bIns="0" rtlCol="0" anchor="t"/>
+          <a:lstStyle/>
+          <a:p>
+            <a:pPr algn="l" indent="0" marL="0">
+              <a:lnSpc>
+                <a:spcPts val="2053"/>
+              </a:lnSpc>
+              <a:buNone/>
+            </a:pPr>
+            <a:r>
+              <a:rPr lang="en-US" sz="1466" dirty="0">
+                <a:solidFill>
+                  <a:srgbClr val="111111"/>
+                </a:solidFill>
+                <a:latin typeface="Inter" pitchFamily="34" charset="0"/>
+                <a:ea typeface="Inter" pitchFamily="34" charset="-122"/>
+                <a:cs typeface="Inter" pitchFamily="34" charset="-120"/>
+              </a:rPr>
+              <a:t>04 / 05</a:t>
+            </a:r>
+            <a:endParaRPr lang="en-US" sz="1466" dirty="0"/>
+          </a:p>
+        </p:txBody>
+      </p:sp>
+      <p:sp>
+        <p:nvSpPr>
+          <p:cNvPr id="4" name="Text 2"/>
+          <p:cNvSpPr/>
+          <p:nvPr/>
+        </p:nvSpPr>
+        <p:spPr>
+          <a:xfrm>
+            <a:off x="677098" y="937816"/>
+            <a:ext cx="10834756" cy="50800"/>
+          </a:xfrm>
+          <a:prstGeom prst="rect">
+            <a:avLst/>
+          </a:prstGeom>
+          <a:solidFill>
+            <a:srgbClr val="111111"/>
+          </a:solidFill>
+          <a:ln/>
+        </p:spPr>
+        <p:txBody>
+          <a:bodyPr wrap="square" rtlCol="0" anchor="ctr"/>
+          <a:lstStyle/>
+          <a:p>
+            <a:pPr indent="0" marL="0">
+              <a:buNone/>
+            </a:pPr>
+            <a:endParaRPr lang="en-US" dirty="0"/>
+          </a:p>
+        </p:txBody>
+      </p:sp>
+      <p:sp>
+        <p:nvSpPr>
+          <p:cNvPr id="5" name="Text 3"/>
+          <p:cNvSpPr/>
+          <p:nvPr/>
+        </p:nvSpPr>
+        <p:spPr>
+          <a:xfrm>
+            <a:off x="677098" y="1259483"/>
+            <a:ext cx="11051451" cy="690761"/>
+          </a:xfrm>
+          <a:prstGeom prst="rect">
+            <a:avLst/>
+          </a:prstGeom>
+          <a:noFill/>
+          <a:ln/>
+        </p:spPr>
+        <p:txBody>
+          <a:bodyPr wrap="square" lIns="0" tIns="0" rIns="0" bIns="0" rtlCol="0" anchor="t"/>
+          <a:lstStyle/>
+          <a:p>
+            <a:pPr algn="l" indent="0" marL="0">
+              <a:lnSpc>
+                <a:spcPts val="5439"/>
+              </a:lnSpc>
+              <a:spcAft>
+                <a:spcPts val="1866"/>
+              </a:spcAft>
+              <a:buNone/>
+            </a:pPr>
+            <a:r>
+              <a:rPr lang="en-US" sz="4533" b="1" dirty="0">
+                <a:solidFill>
+                  <a:srgbClr val="111111"/>
+                </a:solidFill>
+                <a:latin typeface="ArchivoBlack" pitchFamily="34" charset="0"/>
+                <a:ea typeface="ArchivoBlack" pitchFamily="34" charset="-122"/>
+                <a:cs typeface="ArchivoBlack" pitchFamily="34" charset="-120"/>
+              </a:rPr>
+              <a:t>Make one path the only path</a:t>
+            </a:r>
+            <a:endParaRPr lang="en-US" sz="4533" dirty="0"/>
+          </a:p>
+        </p:txBody>
+      </p:sp>
+      <p:sp>
+        <p:nvSpPr>
+          <p:cNvPr id="6" name="Text 4"/>
+          <p:cNvSpPr/>
+          <p:nvPr/>
+        </p:nvSpPr>
+        <p:spPr>
+          <a:xfrm>
+            <a:off x="677098" y="2187178"/>
+            <a:ext cx="10834756" cy="50800"/>
+          </a:xfrm>
+          <a:prstGeom prst="rect">
+            <a:avLst/>
+          </a:prstGeom>
+          <a:solidFill>
+            <a:srgbClr val="111111"/>
+          </a:solidFill>
+          <a:ln/>
+        </p:spPr>
+        <p:txBody>
+          <a:bodyPr wrap="square" rtlCol="0" anchor="ctr"/>
+          <a:lstStyle/>
+          <a:p>
+            <a:pPr indent="0" marL="0">
+              <a:buNone/>
+            </a:pPr>
+            <a:endParaRPr lang="en-US" dirty="0"/>
+          </a:p>
+        </p:txBody>
+      </p:sp>
+      <p:sp>
+        <p:nvSpPr>
+          <p:cNvPr id="7" name="Text 5"/>
+          <p:cNvSpPr/>
+          <p:nvPr/>
+        </p:nvSpPr>
+        <p:spPr>
+          <a:xfrm>
+            <a:off x="677098" y="2322513"/>
+            <a:ext cx="372374" cy="372467"/>
+          </a:xfrm>
+          <a:prstGeom prst="rect">
+            <a:avLst/>
+          </a:prstGeom>
+          <a:solidFill>
+            <a:srgbClr val="111111"/>
+          </a:solidFill>
+          <a:ln/>
+        </p:spPr>
+        <p:txBody>
+          <a:bodyPr wrap="square" rtlCol="0" anchor="ctr"/>
+          <a:lstStyle/>
+          <a:p>
+            <a:pPr indent="0" marL="0">
+              <a:buNone/>
+            </a:pPr>
+            <a:endParaRPr lang="en-US" dirty="0"/>
+          </a:p>
+        </p:txBody>
+      </p:sp>
+      <p:sp>
+        <p:nvSpPr>
+          <p:cNvPr id="8" name="Text 6"/>
+          <p:cNvSpPr/>
+          <p:nvPr/>
+        </p:nvSpPr>
+        <p:spPr>
+          <a:xfrm>
+            <a:off x="793353" y="2366566"/>
+            <a:ext cx="142458" cy="284361"/>
+          </a:xfrm>
+          <a:prstGeom prst="rect">
+            <a:avLst/>
+          </a:prstGeom>
+          <a:noFill/>
+          <a:ln/>
+        </p:spPr>
+        <p:txBody>
+          <a:bodyPr wrap="square" lIns="0" tIns="0" rIns="0" bIns="0" rtlCol="0" anchor="t"/>
+          <a:lstStyle/>
+          <a:p>
+            <a:pPr algn="l" indent="0" marL="0">
+              <a:lnSpc>
+                <a:spcPts val="2240"/>
+              </a:lnSpc>
+              <a:buNone/>
+            </a:pPr>
+            <a:r>
+              <a:rPr lang="en-US" sz="1600" b="1" dirty="0">
+                <a:solidFill>
+                  <a:srgbClr val="F2F0EB"/>
+                </a:solidFill>
+                <a:latin typeface="ArchivoBlack" pitchFamily="34" charset="0"/>
+                <a:ea typeface="ArchivoBlack" pitchFamily="34" charset="-122"/>
+                <a:cs typeface="ArchivoBlack" pitchFamily="34" charset="-120"/>
+              </a:rPr>
+              <a:t>1</a:t>
+            </a:r>
+            <a:endParaRPr lang="en-US" sz="1600" dirty="0"/>
+          </a:p>
+        </p:txBody>
+      </p:sp>
+      <p:sp>
+        <p:nvSpPr>
+          <p:cNvPr id="9" name="Text 7"/>
+          <p:cNvSpPr/>
+          <p:nvPr/>
+        </p:nvSpPr>
+        <p:spPr>
+          <a:xfrm>
+            <a:off x="1252621" y="2322513"/>
+            <a:ext cx="3453401" cy="297061"/>
+          </a:xfrm>
+          <a:prstGeom prst="rect">
+            <a:avLst/>
+          </a:prstGeom>
+          <a:noFill/>
+          <a:ln/>
+        </p:spPr>
+        <p:txBody>
+          <a:bodyPr wrap="square" lIns="0" tIns="0" rIns="0" bIns="0" rtlCol="0" anchor="t"/>
+          <a:lstStyle/>
+          <a:p>
+            <a:pPr algn="l" indent="0" marL="0">
+              <a:lnSpc>
+                <a:spcPts val="2340"/>
+              </a:lnSpc>
+              <a:buNone/>
+            </a:pPr>
+            <a:r>
+              <a:rPr lang="en-US" sz="1733" b="1" dirty="0">
+                <a:solidFill>
+                  <a:srgbClr val="111111"/>
+                </a:solidFill>
+                <a:latin typeface="ArchivoBlack" pitchFamily="34" charset="0"/>
+                <a:ea typeface="ArchivoBlack" pitchFamily="34" charset="-122"/>
+                <a:cs typeface="ArchivoBlack" pitchFamily="34" charset="-120"/>
+              </a:rPr>
+              <a:t>READ-ONLY BY DEFAULT</a:t>
+            </a:r>
+            <a:endParaRPr lang="en-US" sz="1733" dirty="0"/>
+          </a:p>
+        </p:txBody>
+      </p:sp>
+      <p:sp>
+        <p:nvSpPr>
+          <p:cNvPr id="10" name="Text 8"/>
+          <p:cNvSpPr/>
+          <p:nvPr/>
+        </p:nvSpPr>
+        <p:spPr>
+          <a:xfrm>
+            <a:off x="4841458" y="2322513"/>
+            <a:ext cx="6803804" cy="687388"/>
+          </a:xfrm>
+          <a:prstGeom prst="rect">
+            <a:avLst/>
+          </a:prstGeom>
+          <a:noFill/>
+          <a:ln/>
+        </p:spPr>
+        <p:txBody>
+          <a:bodyPr wrap="square" lIns="0" tIns="0" rIns="0" bIns="0" rtlCol="0" anchor="t"/>
+          <a:lstStyle/>
+          <a:p>
+            <a:pPr algn="l" indent="0" marL="0">
+              <a:lnSpc>
+                <a:spcPts val="2706"/>
+              </a:lnSpc>
+              <a:buNone/>
+            </a:pPr>
+            <a:r>
+              <a:rPr lang="en-US" sz="1866" dirty="0">
+                <a:solidFill>
+                  <a:srgbClr val="111111"/>
+                </a:solidFill>
+                <a:latin typeface="Inter" pitchFamily="34" charset="0"/>
+                <a:ea typeface="Inter" pitchFamily="34" charset="-122"/>
+                <a:cs typeface="Inter" pitchFamily="34" charset="-120"/>
+              </a:rPr>
+              <a:t>Human roles in production carry read and describe. Write belongs to the pipeline’s identity, and to nothing else.</a:t>
+            </a:r>
+            <a:endParaRPr lang="en-US" sz="1866" dirty="0"/>
+          </a:p>
+        </p:txBody>
+      </p:sp>
+      <p:sp>
+        <p:nvSpPr>
+          <p:cNvPr id="11" name="Text 9"/>
+          <p:cNvSpPr/>
+          <p:nvPr/>
+        </p:nvSpPr>
+        <p:spPr>
+          <a:xfrm>
+            <a:off x="677098" y="3094434"/>
+            <a:ext cx="10834756" cy="50800"/>
+          </a:xfrm>
+          <a:prstGeom prst="rect">
+            <a:avLst/>
+          </a:prstGeom>
+          <a:solidFill>
+            <a:srgbClr val="111111"/>
+          </a:solidFill>
+          <a:ln/>
+        </p:spPr>
+        <p:txBody>
+          <a:bodyPr wrap="square" rtlCol="0" anchor="ctr"/>
+          <a:lstStyle/>
+          <a:p>
+            <a:pPr indent="0" marL="0">
+              <a:buNone/>
+            </a:pPr>
+            <a:endParaRPr lang="en-US" dirty="0"/>
+          </a:p>
+        </p:txBody>
+      </p:sp>
+      <p:sp>
+        <p:nvSpPr>
+          <p:cNvPr id="12" name="Text 10"/>
+          <p:cNvSpPr/>
+          <p:nvPr/>
+        </p:nvSpPr>
+        <p:spPr>
+          <a:xfrm>
+            <a:off x="677098" y="3229769"/>
+            <a:ext cx="372374" cy="372467"/>
+          </a:xfrm>
+          <a:prstGeom prst="rect">
+            <a:avLst/>
+          </a:prstGeom>
+          <a:solidFill>
+            <a:srgbClr val="111111"/>
+          </a:solidFill>
+          <a:ln/>
+        </p:spPr>
+        <p:txBody>
+          <a:bodyPr wrap="square" rtlCol="0" anchor="ctr"/>
+          <a:lstStyle/>
+          <a:p>
+            <a:pPr indent="0" marL="0">
+              <a:buNone/>
+            </a:pPr>
+            <a:endParaRPr lang="en-US" dirty="0"/>
+          </a:p>
+        </p:txBody>
+      </p:sp>
+      <p:sp>
+        <p:nvSpPr>
+          <p:cNvPr id="13" name="Text 11"/>
+          <p:cNvSpPr/>
+          <p:nvPr/>
+        </p:nvSpPr>
+        <p:spPr>
+          <a:xfrm>
+            <a:off x="793353" y="3273822"/>
+            <a:ext cx="142458" cy="284361"/>
+          </a:xfrm>
+          <a:prstGeom prst="rect">
+            <a:avLst/>
+          </a:prstGeom>
+          <a:noFill/>
+          <a:ln/>
+        </p:spPr>
+        <p:txBody>
+          <a:bodyPr wrap="square" lIns="0" tIns="0" rIns="0" bIns="0" rtlCol="0" anchor="t"/>
+          <a:lstStyle/>
+          <a:p>
+            <a:pPr algn="l" indent="0" marL="0">
+              <a:lnSpc>
+                <a:spcPts val="2240"/>
+              </a:lnSpc>
+              <a:buNone/>
+            </a:pPr>
+            <a:r>
+              <a:rPr lang="en-US" sz="1600" b="1" dirty="0">
+                <a:solidFill>
+                  <a:srgbClr val="F2F0EB"/>
+                </a:solidFill>
+                <a:latin typeface="ArchivoBlack" pitchFamily="34" charset="0"/>
+                <a:ea typeface="ArchivoBlack" pitchFamily="34" charset="-122"/>
+                <a:cs typeface="ArchivoBlack" pitchFamily="34" charset="-120"/>
+              </a:rPr>
+              <a:t>2</a:t>
+            </a:r>
+            <a:endParaRPr lang="en-US" sz="1600" dirty="0"/>
+          </a:p>
+        </p:txBody>
+      </p:sp>
+      <p:sp>
+        <p:nvSpPr>
+          <p:cNvPr id="14" name="Text 12"/>
+          <p:cNvSpPr/>
+          <p:nvPr/>
+        </p:nvSpPr>
+        <p:spPr>
+          <a:xfrm>
+            <a:off x="1252621" y="3229769"/>
+            <a:ext cx="3453401" cy="297061"/>
+          </a:xfrm>
+          <a:prstGeom prst="rect">
+            <a:avLst/>
+          </a:prstGeom>
+          <a:noFill/>
+          <a:ln/>
+        </p:spPr>
+        <p:txBody>
+          <a:bodyPr wrap="square" lIns="0" tIns="0" rIns="0" bIns="0" rtlCol="0" anchor="t"/>
+          <a:lstStyle/>
+          <a:p>
+            <a:pPr algn="l" indent="0" marL="0">
+              <a:lnSpc>
+                <a:spcPts val="2340"/>
+              </a:lnSpc>
+              <a:buNone/>
+            </a:pPr>
+            <a:r>
+              <a:rPr lang="en-US" sz="1733" b="1" dirty="0">
+                <a:solidFill>
+                  <a:srgbClr val="111111"/>
+                </a:solidFill>
+                <a:latin typeface="ArchivoBlack" pitchFamily="34" charset="0"/>
+                <a:ea typeface="ArchivoBlack" pitchFamily="34" charset="-122"/>
+                <a:cs typeface="ArchivoBlack" pitchFamily="34" charset="-120"/>
+              </a:rPr>
+              <a:t>BREAK-GLASS EXPIRES</a:t>
+            </a:r>
+            <a:endParaRPr lang="en-US" sz="1733" dirty="0"/>
+          </a:p>
+        </p:txBody>
+      </p:sp>
+      <p:sp>
+        <p:nvSpPr>
+          <p:cNvPr id="15" name="Text 13"/>
+          <p:cNvSpPr/>
+          <p:nvPr/>
+        </p:nvSpPr>
+        <p:spPr>
+          <a:xfrm>
+            <a:off x="4841458" y="3229769"/>
+            <a:ext cx="6803804" cy="687388"/>
+          </a:xfrm>
+          <a:prstGeom prst="rect">
+            <a:avLst/>
+          </a:prstGeom>
+          <a:noFill/>
+          <a:ln/>
+        </p:spPr>
+        <p:txBody>
+          <a:bodyPr wrap="square" lIns="0" tIns="0" rIns="0" bIns="0" rtlCol="0" anchor="t"/>
+          <a:lstStyle/>
+          <a:p>
+            <a:pPr algn="l" indent="0" marL="0">
+              <a:lnSpc>
+                <a:spcPts val="2706"/>
+              </a:lnSpc>
+              <a:buNone/>
+            </a:pPr>
+            <a:r>
+              <a:rPr lang="en-US" sz="1866" dirty="0">
+                <a:solidFill>
+                  <a:srgbClr val="111111"/>
+                </a:solidFill>
+                <a:latin typeface="Inter" pitchFamily="34" charset="0"/>
+                <a:ea typeface="Inter" pitchFamily="34" charset="-122"/>
+                <a:cs typeface="Inter" pitchFamily="34" charset="-120"/>
+              </a:rPr>
+              <a:t>Elevation is one click, time-boxed, and it writes a record: who, what, why, and when it lapsed.</a:t>
+            </a:r>
+            <a:endParaRPr lang="en-US" sz="1866" dirty="0"/>
+          </a:p>
+        </p:txBody>
+      </p:sp>
+      <p:sp>
+        <p:nvSpPr>
+          <p:cNvPr id="16" name="Text 14"/>
+          <p:cNvSpPr/>
+          <p:nvPr/>
+        </p:nvSpPr>
+        <p:spPr>
+          <a:xfrm>
+            <a:off x="677098" y="4001691"/>
+            <a:ext cx="10834756" cy="50800"/>
+          </a:xfrm>
+          <a:prstGeom prst="rect">
+            <a:avLst/>
+          </a:prstGeom>
+          <a:solidFill>
+            <a:srgbClr val="FF4A1C"/>
+          </a:solidFill>
+          <a:ln/>
+        </p:spPr>
+        <p:txBody>
+          <a:bodyPr wrap="square" rtlCol="0" anchor="ctr"/>
+          <a:lstStyle/>
+          <a:p>
+            <a:pPr indent="0" marL="0">
+              <a:buNone/>
+            </a:pPr>
+            <a:endParaRPr lang="en-US" dirty="0"/>
+          </a:p>
+        </p:txBody>
+      </p:sp>
+      <p:sp>
+        <p:nvSpPr>
+          <p:cNvPr id="17" name="Text 15"/>
+          <p:cNvSpPr/>
+          <p:nvPr/>
+        </p:nvSpPr>
+        <p:spPr>
+          <a:xfrm>
+            <a:off x="677098" y="4137025"/>
+            <a:ext cx="372374" cy="372467"/>
+          </a:xfrm>
+          <a:prstGeom prst="rect">
+            <a:avLst/>
+          </a:prstGeom>
+          <a:solidFill>
+            <a:srgbClr val="111111"/>
+          </a:solidFill>
+          <a:ln/>
+        </p:spPr>
+        <p:txBody>
+          <a:bodyPr wrap="square" rtlCol="0" anchor="ctr"/>
+          <a:lstStyle/>
+          <a:p>
+            <a:pPr indent="0" marL="0">
+              <a:buNone/>
+            </a:pPr>
+            <a:endParaRPr lang="en-US" dirty="0"/>
+          </a:p>
+        </p:txBody>
+      </p:sp>
+      <p:sp>
+        <p:nvSpPr>
+          <p:cNvPr id="18" name="Text 16"/>
+          <p:cNvSpPr/>
+          <p:nvPr/>
+        </p:nvSpPr>
+        <p:spPr>
+          <a:xfrm>
+            <a:off x="793353" y="4181078"/>
+            <a:ext cx="142458" cy="284361"/>
+          </a:xfrm>
+          <a:prstGeom prst="rect">
+            <a:avLst/>
+          </a:prstGeom>
+          <a:noFill/>
+          <a:ln/>
+        </p:spPr>
+        <p:txBody>
+          <a:bodyPr wrap="square" lIns="0" tIns="0" rIns="0" bIns="0" rtlCol="0" anchor="t"/>
+          <a:lstStyle/>
+          <a:p>
+            <a:pPr algn="l" indent="0" marL="0">
+              <a:lnSpc>
+                <a:spcPts val="2240"/>
+              </a:lnSpc>
+              <a:buNone/>
+            </a:pPr>
+            <a:r>
+              <a:rPr lang="en-US" sz="1600" b="1" dirty="0">
+                <a:solidFill>
+                  <a:srgbClr val="F2F0EB"/>
+                </a:solidFill>
+                <a:latin typeface="ArchivoBlack" pitchFamily="34" charset="0"/>
+                <a:ea typeface="ArchivoBlack" pitchFamily="34" charset="-122"/>
+                <a:cs typeface="ArchivoBlack" pitchFamily="34" charset="-120"/>
+              </a:rPr>
+              <a:t>3</a:t>
+            </a:r>
+            <a:endParaRPr lang="en-US" sz="1600" dirty="0"/>
+          </a:p>
+        </p:txBody>
+      </p:sp>
+      <p:sp>
+        <p:nvSpPr>
+          <p:cNvPr id="19" name="Text 17"/>
+          <p:cNvSpPr/>
+          <p:nvPr/>
+        </p:nvSpPr>
+        <p:spPr>
+          <a:xfrm>
+            <a:off x="1252621" y="4137025"/>
+            <a:ext cx="3453401" cy="297061"/>
+          </a:xfrm>
+          <a:prstGeom prst="rect">
+            <a:avLst/>
+          </a:prstGeom>
+          <a:noFill/>
+          <a:ln/>
+        </p:spPr>
+        <p:txBody>
+          <a:bodyPr wrap="square" lIns="0" tIns="0" rIns="0" bIns="0" rtlCol="0" anchor="t"/>
+          <a:lstStyle/>
+          <a:p>
+            <a:pPr algn="l" indent="0" marL="0">
+              <a:lnSpc>
+                <a:spcPts val="2340"/>
+              </a:lnSpc>
+              <a:buNone/>
+            </a:pPr>
+            <a:r>
+              <a:rPr lang="en-US" sz="1733" b="1" dirty="0">
+                <a:solidFill>
+                  <a:srgbClr val="111111"/>
+                </a:solidFill>
+                <a:latin typeface="ArchivoBlack" pitchFamily="34" charset="0"/>
+                <a:ea typeface="ArchivoBlack" pitchFamily="34" charset="-122"/>
+                <a:cs typeface="ArchivoBlack" pitchFamily="34" charset="-120"/>
+              </a:rPr>
+              <a:t>CLOSE THE GAP</a:t>
+            </a:r>
+            <a:endParaRPr lang="en-US" sz="1733" dirty="0"/>
+          </a:p>
+        </p:txBody>
+      </p:sp>
+      <p:sp>
+        <p:nvSpPr>
+          <p:cNvPr id="20" name="Text 18"/>
+          <p:cNvSpPr/>
+          <p:nvPr/>
+        </p:nvSpPr>
+        <p:spPr>
+          <a:xfrm>
+            <a:off x="4841458" y="4137025"/>
+            <a:ext cx="6803804" cy="687388"/>
+          </a:xfrm>
+          <a:prstGeom prst="rect">
+            <a:avLst/>
+          </a:prstGeom>
+          <a:noFill/>
+          <a:ln/>
+        </p:spPr>
+        <p:txBody>
+          <a:bodyPr wrap="square" lIns="0" tIns="0" rIns="0" bIns="0" rtlCol="0" anchor="t"/>
+          <a:lstStyle/>
+          <a:p>
+            <a:pPr algn="l" indent="0" marL="0">
+              <a:lnSpc>
+                <a:spcPts val="2706"/>
+              </a:lnSpc>
+              <a:buNone/>
+            </a:pPr>
+            <a:r>
+              <a:rPr lang="en-US" sz="1866" dirty="0">
+                <a:solidFill>
+                  <a:srgbClr val="111111"/>
+                </a:solidFill>
+                <a:latin typeface="Inter" pitchFamily="34" charset="0"/>
+                <a:ea typeface="Inter" pitchFamily="34" charset="-122"/>
+                <a:cs typeface="Inter" pitchFamily="34" charset="-120"/>
+              </a:rPr>
+              <a:t>Every use of the glass files a ticket against the paved path: the slow step, the missing field.</a:t>
+            </a:r>
+            <a:endParaRPr lang="en-US" sz="1866" dirty="0"/>
+          </a:p>
+        </p:txBody>
+      </p:sp>
+      <p:sp>
+        <p:nvSpPr>
+          <p:cNvPr id="21" name="Text 19"/>
+          <p:cNvSpPr/>
+          <p:nvPr/>
+        </p:nvSpPr>
+        <p:spPr>
+          <a:xfrm>
+            <a:off x="677098" y="4908947"/>
+            <a:ext cx="10834756" cy="50800"/>
+          </a:xfrm>
+          <a:prstGeom prst="rect">
+            <a:avLst/>
+          </a:prstGeom>
+          <a:solidFill>
+            <a:srgbClr val="111111"/>
+          </a:solidFill>
+          <a:ln/>
+        </p:spPr>
+        <p:txBody>
+          <a:bodyPr wrap="square" rtlCol="0" anchor="ctr"/>
+          <a:lstStyle/>
+          <a:p>
+            <a:pPr indent="0" marL="0">
+              <a:buNone/>
+            </a:pPr>
+            <a:endParaRPr lang="en-US" dirty="0"/>
+          </a:p>
+        </p:txBody>
+      </p:sp>
+      <p:sp>
+        <p:nvSpPr>
+          <p:cNvPr id="22" name="Text 20"/>
+          <p:cNvSpPr/>
+          <p:nvPr/>
+        </p:nvSpPr>
+        <p:spPr>
+          <a:xfrm>
+            <a:off x="677098" y="5273477"/>
+            <a:ext cx="11051451" cy="392708"/>
+          </a:xfrm>
+          <a:prstGeom prst="rect">
+            <a:avLst/>
+          </a:prstGeom>
+          <a:noFill/>
+          <a:ln/>
+        </p:spPr>
+        <p:txBody>
+          <a:bodyPr wrap="square" lIns="0" tIns="0" rIns="0" bIns="0" rtlCol="0" anchor="t"/>
+          <a:lstStyle/>
+          <a:p>
+            <a:pPr algn="l" indent="0" marL="0">
+              <a:lnSpc>
+                <a:spcPts val="3093"/>
+              </a:lnSpc>
+              <a:spcBef>
+                <a:spcPts val="2470"/>
+              </a:spcBef>
+              <a:buNone/>
+            </a:pPr>
+            <a:r>
+              <a:rPr lang="en-US" sz="2133" dirty="0">
+                <a:solidFill>
+                  <a:srgbClr val="111111"/>
+                </a:solidFill>
+                <a:latin typeface="Inter" pitchFamily="34" charset="0"/>
+                <a:ea typeface="Inter" pitchFamily="34" charset="-122"/>
+                <a:cs typeface="Inter" pitchFamily="34" charset="-120"/>
+              </a:rPr>
+              <a:t>Do the first two without the third and the drift just moves out of sight.</a:t>
+            </a:r>
+            <a:endParaRPr lang="en-US" sz="2133" dirty="0"/>
+          </a:p>
+        </p:txBody>
+      </p:sp>
+      <p:sp>
+        <p:nvSpPr>
+          <p:cNvPr id="23" name="Text 21"/>
+          <p:cNvSpPr/>
+          <p:nvPr/>
+        </p:nvSpPr>
+        <p:spPr>
+          <a:xfrm>
+            <a:off x="677098" y="5869384"/>
+            <a:ext cx="10834756" cy="50800"/>
+          </a:xfrm>
+          <a:prstGeom prst="rect">
+            <a:avLst/>
+          </a:prstGeom>
+          <a:solidFill>
+            <a:srgbClr val="111111"/>
+          </a:solidFill>
+          <a:ln/>
+        </p:spPr>
+        <p:txBody>
+          <a:bodyPr wrap="square" rtlCol="0" anchor="ctr"/>
+          <a:lstStyle/>
+          <a:p>
+            <a:pPr indent="0" marL="0">
+              <a:buNone/>
+            </a:pPr>
+            <a:endParaRPr lang="en-US" dirty="0"/>
+          </a:p>
+        </p:txBody>
+      </p:sp>
+      <p:sp>
+        <p:nvSpPr>
+          <p:cNvPr id="24" name="Text 22"/>
+          <p:cNvSpPr/>
+          <p:nvPr/>
+        </p:nvSpPr>
+        <p:spPr>
+          <a:xfrm>
+            <a:off x="677098" y="6055519"/>
+            <a:ext cx="2673928" cy="260747"/>
+          </a:xfrm>
+          <a:prstGeom prst="rect">
+            <a:avLst/>
+          </a:prstGeom>
+          <a:noFill/>
+          <a:ln/>
+        </p:spPr>
+        <p:txBody>
+          <a:bodyPr wrap="square" lIns="0" tIns="0" rIns="0" bIns="0" rtlCol="0" anchor="t"/>
+          <a:lstStyle/>
+          <a:p>
+            <a:pPr algn="l" indent="0" marL="0">
+              <a:lnSpc>
+                <a:spcPts val="2053"/>
+              </a:lnSpc>
+              <a:buNone/>
+            </a:pPr>
+            <a:r>
+              <a:rPr lang="en-US" sz="1466" dirty="0">
+                <a:solidFill>
+                  <a:srgbClr val="111111"/>
+                </a:solidFill>
+                <a:latin typeface="Inter" pitchFamily="34" charset="0"/>
+                <a:ea typeface="Inter" pitchFamily="34" charset="-122"/>
+                <a:cs typeface="Inter" pitchFamily="34" charset="-120"/>
+              </a:rPr>
+              <a:t>INFRASTRUCTURE DRIFT</a:t>
+            </a:r>
+            <a:endParaRPr lang="en-US" sz="1466" dirty="0"/>
+          </a:p>
+        </p:txBody>
+      </p:sp>
+      <p:sp>
+        <p:nvSpPr>
+          <p:cNvPr id="25" name="Text 23"/>
+          <p:cNvSpPr/>
+          <p:nvPr/>
+        </p:nvSpPr>
+        <p:spPr>
+          <a:xfrm>
+            <a:off x="6249615" y="6055519"/>
+            <a:ext cx="5367484" cy="260747"/>
+          </a:xfrm>
+          <a:prstGeom prst="rect">
+            <a:avLst/>
+          </a:prstGeom>
+          <a:noFill/>
+          <a:ln/>
+        </p:spPr>
+        <p:txBody>
+          <a:bodyPr wrap="square" lIns="0" tIns="0" rIns="0" bIns="0" rtlCol="0" anchor="t"/>
+          <a:lstStyle/>
+          <a:p>
+            <a:pPr algn="l" indent="0" marL="0">
+              <a:lnSpc>
+                <a:spcPts val="2053"/>
+              </a:lnSpc>
+              <a:buNone/>
+            </a:pPr>
+            <a:r>
+              <a:rPr lang="en-US" sz="1466" dirty="0">
+                <a:solidFill>
+                  <a:srgbClr val="111111"/>
+                </a:solidFill>
+                <a:latin typeface="Inter" pitchFamily="34" charset="0"/>
+                <a:ea typeface="Inter" pitchFamily="34" charset="-122"/>
+                <a:cs typeface="Inter" pitchFamily="34" charset="-120"/>
+              </a:rPr>
+              <a:t>THE THIRD MOVE IS THE ONE THAT GETS SKIPPED</a:t>
+            </a:r>
+            <a:endParaRPr lang="en-US" sz="1466" dirty="0"/>
+          </a:p>
+        </p:txBody>
+      </p:sp>
     </p:spTree>
   </p:cSld>
   <p:clrMapOvr>
@@ -1406,6 +4735,13 @@
 <file path=ppt/slides/slide5.xml><?xml version="1.0" encoding="utf-8"?>
 <p:sld xmlns:a="http://schemas.openxmlformats.org/drawingml/2006/main" xmlns:r="http://schemas.openxmlformats.org/officeDocument/2006/relationships" xmlns:p="http://schemas.openxmlformats.org/presentationml/2006/main">
   <p:cSld name="Slide 5">
+    <p:bg>
+      <p:bgPr>
+        <a:solidFill>
+          <a:srgbClr val="F2F0EB"/>
+        </a:solidFill>
+      </p:bgPr>
+    </p:bg>
     <p:spTree>
       <p:nvGrpSpPr>
         <p:cNvPr id="1" name=""/>
@@ -1420,30 +4756,822 @@
           <a:chExt cx="0" cy="0"/>
         </a:xfrm>
       </p:grpSpPr>
-      <p:pic>
-        <p:nvPicPr>
-          <p:cNvPr id="2" name="Image 0" descr="/tmp/slide-1787840584854-7ui799b2yq.png">    </p:cNvPr>
-          <p:cNvPicPr>
-            <a:picLocks noChangeAspect="1"/>
-          </p:cNvPicPr>
-          <p:nvPr/>
-        </p:nvPicPr>
-        <p:blipFill>
-          <a:blip r:embed="rId1"/>
-          <a:stretch>
-            <a:fillRect/>
-          </a:stretch>
-        </p:blipFill>
-        <p:spPr>
-          <a:xfrm>
-            <a:off x="0" y="0"/>
-            <a:ext cx="12188952" cy="6858000"/>
-          </a:xfrm>
-          <a:prstGeom prst="rect">
-            <a:avLst/>
-          </a:prstGeom>
-        </p:spPr>
-      </p:pic>
+      <p:sp>
+        <p:nvSpPr>
+          <p:cNvPr id="2" name="Text 0"/>
+          <p:cNvSpPr/>
+          <p:nvPr/>
+        </p:nvSpPr>
+        <p:spPr>
+          <a:xfrm>
+            <a:off x="677098" y="541734"/>
+            <a:ext cx="3389052" cy="260747"/>
+          </a:xfrm>
+          <a:prstGeom prst="rect">
+            <a:avLst/>
+          </a:prstGeom>
+          <a:noFill/>
+          <a:ln/>
+        </p:spPr>
+        <p:txBody>
+          <a:bodyPr wrap="square" lIns="0" tIns="0" rIns="0" bIns="0" rtlCol="0" anchor="t"/>
+          <a:lstStyle/>
+          <a:p>
+            <a:pPr algn="l" indent="0" marL="0">
+              <a:lnSpc>
+                <a:spcPts val="2053"/>
+              </a:lnSpc>
+              <a:buNone/>
+            </a:pPr>
+            <a:r>
+              <a:rPr lang="en-US" sz="1466" dirty="0">
+                <a:solidFill>
+                  <a:srgbClr val="111111"/>
+                </a:solidFill>
+                <a:latin typeface="Inter" pitchFamily="34" charset="0"/>
+                <a:ea typeface="Inter" pitchFamily="34" charset="-122"/>
+                <a:cs typeface="Inter" pitchFamily="34" charset="-120"/>
+              </a:rPr>
+              <a:t>05 · WHAT WE HAVE TO DECIDE</a:t>
+            </a:r>
+            <a:endParaRPr lang="en-US" sz="1466" dirty="0"/>
+          </a:p>
+        </p:txBody>
+      </p:sp>
+      <p:sp>
+        <p:nvSpPr>
+          <p:cNvPr id="3" name="Text 1"/>
+          <p:cNvSpPr/>
+          <p:nvPr/>
+        </p:nvSpPr>
+        <p:spPr>
+          <a:xfrm>
+            <a:off x="10785358" y="541734"/>
+            <a:ext cx="741026" cy="260747"/>
+          </a:xfrm>
+          <a:prstGeom prst="rect">
+            <a:avLst/>
+          </a:prstGeom>
+          <a:noFill/>
+          <a:ln/>
+        </p:spPr>
+        <p:txBody>
+          <a:bodyPr wrap="square" lIns="0" tIns="0" rIns="0" bIns="0" rtlCol="0" anchor="t"/>
+          <a:lstStyle/>
+          <a:p>
+            <a:pPr algn="l" indent="0" marL="0">
+              <a:lnSpc>
+                <a:spcPts val="2053"/>
+              </a:lnSpc>
+              <a:buNone/>
+            </a:pPr>
+            <a:r>
+              <a:rPr lang="en-US" sz="1466" dirty="0">
+                <a:solidFill>
+                  <a:srgbClr val="111111"/>
+                </a:solidFill>
+                <a:latin typeface="Inter" pitchFamily="34" charset="0"/>
+                <a:ea typeface="Inter" pitchFamily="34" charset="-122"/>
+                <a:cs typeface="Inter" pitchFamily="34" charset="-120"/>
+              </a:rPr>
+              <a:t>05 / 05</a:t>
+            </a:r>
+            <a:endParaRPr lang="en-US" sz="1466" dirty="0"/>
+          </a:p>
+        </p:txBody>
+      </p:sp>
+      <p:sp>
+        <p:nvSpPr>
+          <p:cNvPr id="4" name="Text 2"/>
+          <p:cNvSpPr/>
+          <p:nvPr/>
+        </p:nvSpPr>
+        <p:spPr>
+          <a:xfrm>
+            <a:off x="677098" y="937816"/>
+            <a:ext cx="10834756" cy="50800"/>
+          </a:xfrm>
+          <a:prstGeom prst="rect">
+            <a:avLst/>
+          </a:prstGeom>
+          <a:solidFill>
+            <a:srgbClr val="111111"/>
+          </a:solidFill>
+          <a:ln/>
+        </p:spPr>
+        <p:txBody>
+          <a:bodyPr wrap="square" rtlCol="0" anchor="ctr"/>
+          <a:lstStyle/>
+          <a:p>
+            <a:pPr indent="0" marL="0">
+              <a:buNone/>
+            </a:pPr>
+            <a:endParaRPr lang="en-US" dirty="0"/>
+          </a:p>
+        </p:txBody>
+      </p:sp>
+      <p:sp>
+        <p:nvSpPr>
+          <p:cNvPr id="5" name="Text 3"/>
+          <p:cNvSpPr/>
+          <p:nvPr/>
+        </p:nvSpPr>
+        <p:spPr>
+          <a:xfrm>
+            <a:off x="677098" y="1633934"/>
+            <a:ext cx="5525523" cy="1219200"/>
+          </a:xfrm>
+          <a:prstGeom prst="rect">
+            <a:avLst/>
+          </a:prstGeom>
+          <a:noFill/>
+          <a:ln/>
+        </p:spPr>
+        <p:txBody>
+          <a:bodyPr wrap="square" lIns="0" tIns="0" rIns="0" bIns="0" rtlCol="0" anchor="t"/>
+          <a:lstStyle/>
+          <a:p>
+            <a:pPr algn="l" indent="0" marL="0">
+              <a:lnSpc>
+                <a:spcPts val="9599"/>
+              </a:lnSpc>
+              <a:buNone/>
+            </a:pPr>
+            <a:r>
+              <a:rPr lang="en-US" sz="7999" b="1" dirty="0">
+                <a:solidFill>
+                  <a:srgbClr val="111111"/>
+                </a:solidFill>
+                <a:latin typeface="ArchivoBlack" pitchFamily="34" charset="0"/>
+                <a:ea typeface="ArchivoBlack" pitchFamily="34" charset="-122"/>
+                <a:cs typeface="ArchivoBlack" pitchFamily="34" charset="-120"/>
+              </a:rPr>
+              <a:t>WHAT WE</a:t>
+            </a:r>
+            <a:endParaRPr lang="en-US" sz="7999" dirty="0"/>
+          </a:p>
+        </p:txBody>
+      </p:sp>
+      <p:sp>
+        <p:nvSpPr>
+          <p:cNvPr id="6" name="Text 4"/>
+          <p:cNvSpPr/>
+          <p:nvPr/>
+        </p:nvSpPr>
+        <p:spPr>
+          <a:xfrm>
+            <a:off x="677098" y="2853134"/>
+            <a:ext cx="5525523" cy="1219200"/>
+          </a:xfrm>
+          <a:prstGeom prst="rect">
+            <a:avLst/>
+          </a:prstGeom>
+          <a:noFill/>
+          <a:ln/>
+        </p:spPr>
+        <p:txBody>
+          <a:bodyPr wrap="square" lIns="0" tIns="0" rIns="0" bIns="0" rtlCol="0" anchor="t"/>
+          <a:lstStyle/>
+          <a:p>
+            <a:pPr algn="l" indent="0" marL="0">
+              <a:lnSpc>
+                <a:spcPts val="9599"/>
+              </a:lnSpc>
+              <a:buNone/>
+            </a:pPr>
+            <a:r>
+              <a:rPr lang="en-US" sz="7999" b="1" dirty="0">
+                <a:solidFill>
+                  <a:srgbClr val="111111"/>
+                </a:solidFill>
+                <a:latin typeface="ArchivoBlack" pitchFamily="34" charset="0"/>
+                <a:ea typeface="ArchivoBlack" pitchFamily="34" charset="-122"/>
+                <a:cs typeface="ArchivoBlack" pitchFamily="34" charset="-120"/>
+              </a:rPr>
+              <a:t>HAVE TO</a:t>
+            </a:r>
+            <a:endParaRPr lang="en-US" sz="7999" dirty="0"/>
+          </a:p>
+        </p:txBody>
+      </p:sp>
+      <p:sp>
+        <p:nvSpPr>
+          <p:cNvPr id="7" name="Text 5"/>
+          <p:cNvSpPr/>
+          <p:nvPr/>
+        </p:nvSpPr>
+        <p:spPr>
+          <a:xfrm>
+            <a:off x="677098" y="4072334"/>
+            <a:ext cx="5525523" cy="1219200"/>
+          </a:xfrm>
+          <a:prstGeom prst="rect">
+            <a:avLst/>
+          </a:prstGeom>
+          <a:noFill/>
+          <a:ln/>
+        </p:spPr>
+        <p:txBody>
+          <a:bodyPr wrap="square" lIns="0" tIns="0" rIns="0" bIns="0" rtlCol="0" anchor="t"/>
+          <a:lstStyle/>
+          <a:p>
+            <a:pPr algn="l" indent="0" marL="0">
+              <a:lnSpc>
+                <a:spcPts val="9599"/>
+              </a:lnSpc>
+              <a:buNone/>
+            </a:pPr>
+            <a:r>
+              <a:rPr lang="en-US" sz="7999" b="1" dirty="0">
+                <a:solidFill>
+                  <a:srgbClr val="FF4A1C"/>
+                </a:solidFill>
+                <a:latin typeface="ArchivoBlack" pitchFamily="34" charset="0"/>
+                <a:ea typeface="ArchivoBlack" pitchFamily="34" charset="-122"/>
+                <a:cs typeface="ArchivoBlack" pitchFamily="34" charset="-120"/>
+              </a:rPr>
+              <a:t>DECIDE</a:t>
+            </a:r>
+            <a:endParaRPr lang="en-US" sz="7999" dirty="0"/>
+          </a:p>
+        </p:txBody>
+      </p:sp>
+      <p:sp>
+        <p:nvSpPr>
+          <p:cNvPr id="8" name="Text 6"/>
+          <p:cNvSpPr/>
+          <p:nvPr/>
+        </p:nvSpPr>
+        <p:spPr>
+          <a:xfrm>
+            <a:off x="6500576" y="1697633"/>
+            <a:ext cx="5011278" cy="50800"/>
+          </a:xfrm>
+          <a:prstGeom prst="rect">
+            <a:avLst/>
+          </a:prstGeom>
+          <a:solidFill>
+            <a:srgbClr val="111111"/>
+          </a:solidFill>
+          <a:ln/>
+        </p:spPr>
+        <p:txBody>
+          <a:bodyPr wrap="square" rtlCol="0" anchor="ctr"/>
+          <a:lstStyle/>
+          <a:p>
+            <a:pPr indent="0" marL="0">
+              <a:buNone/>
+            </a:pPr>
+            <a:endParaRPr lang="en-US" dirty="0"/>
+          </a:p>
+        </p:txBody>
+      </p:sp>
+      <p:sp>
+        <p:nvSpPr>
+          <p:cNvPr id="9" name="Text 7"/>
+          <p:cNvSpPr/>
+          <p:nvPr/>
+        </p:nvSpPr>
+        <p:spPr>
+          <a:xfrm>
+            <a:off x="6500576" y="1917700"/>
+            <a:ext cx="372374" cy="372467"/>
+          </a:xfrm>
+          <a:prstGeom prst="rect">
+            <a:avLst/>
+          </a:prstGeom>
+          <a:solidFill>
+            <a:srgbClr val="111111"/>
+          </a:solidFill>
+          <a:ln/>
+        </p:spPr>
+        <p:txBody>
+          <a:bodyPr wrap="square" rtlCol="0" anchor="ctr"/>
+          <a:lstStyle/>
+          <a:p>
+            <a:pPr indent="0" marL="0">
+              <a:buNone/>
+            </a:pPr>
+            <a:endParaRPr lang="en-US" dirty="0"/>
+          </a:p>
+        </p:txBody>
+      </p:sp>
+      <p:sp>
+        <p:nvSpPr>
+          <p:cNvPr id="10" name="Text 8"/>
+          <p:cNvSpPr/>
+          <p:nvPr/>
+        </p:nvSpPr>
+        <p:spPr>
+          <a:xfrm>
+            <a:off x="6500576" y="1919684"/>
+            <a:ext cx="379822" cy="368300"/>
+          </a:xfrm>
+          <a:prstGeom prst="rect">
+            <a:avLst/>
+          </a:prstGeom>
+          <a:noFill/>
+          <a:ln/>
+        </p:spPr>
+        <p:txBody>
+          <a:bodyPr wrap="square" lIns="0" tIns="0" rIns="0" bIns="0" rtlCol="0" anchor="t"/>
+          <a:lstStyle/>
+          <a:p>
+            <a:pPr algn="l" indent="0" marL="0">
+              <a:lnSpc>
+                <a:spcPts val="2900"/>
+              </a:lnSpc>
+              <a:buNone/>
+            </a:pPr>
+            <a:r>
+              <a:rPr lang="en-US" sz="2000" dirty="0">
+                <a:solidFill>
+                  <a:srgbClr val="F2F0EB"/>
+                </a:solidFill>
+                <a:latin typeface="ArchivoBlack" pitchFamily="34" charset="0"/>
+                <a:ea typeface="ArchivoBlack" pitchFamily="34" charset="-122"/>
+                <a:cs typeface="ArchivoBlack" pitchFamily="34" charset="-120"/>
+              </a:rPr>
+              <a:t>1</a:t>
+            </a:r>
+            <a:endParaRPr lang="en-US" sz="2000" dirty="0"/>
+          </a:p>
+        </p:txBody>
+      </p:sp>
+      <p:sp>
+        <p:nvSpPr>
+          <p:cNvPr id="11" name="Text 9"/>
+          <p:cNvSpPr/>
+          <p:nvPr/>
+        </p:nvSpPr>
+        <p:spPr>
+          <a:xfrm>
+            <a:off x="7076099" y="1917700"/>
+            <a:ext cx="4524470" cy="736600"/>
+          </a:xfrm>
+          <a:prstGeom prst="rect">
+            <a:avLst/>
+          </a:prstGeom>
+          <a:noFill/>
+          <a:ln/>
+        </p:spPr>
+        <p:txBody>
+          <a:bodyPr wrap="square" lIns="0" tIns="0" rIns="0" bIns="0" rtlCol="0" anchor="t"/>
+          <a:lstStyle/>
+          <a:p>
+            <a:pPr algn="l" indent="0" marL="0">
+              <a:lnSpc>
+                <a:spcPts val="2900"/>
+              </a:lnSpc>
+              <a:buNone/>
+            </a:pPr>
+            <a:r>
+              <a:rPr lang="en-US" sz="2000" dirty="0">
+                <a:solidFill>
+                  <a:srgbClr val="111111"/>
+                </a:solidFill>
+                <a:latin typeface="Inter" pitchFamily="34" charset="0"/>
+                <a:ea typeface="Inter" pitchFamily="34" charset="-122"/>
+                <a:cs typeface="Inter" pitchFamily="34" charset="-120"/>
+              </a:rPr>
+              <a:t>Who holds the break-glass, and how long before it lapses?</a:t>
+            </a:r>
+            <a:endParaRPr lang="en-US" sz="2000" dirty="0"/>
+          </a:p>
+        </p:txBody>
+      </p:sp>
+      <p:sp>
+        <p:nvSpPr>
+          <p:cNvPr id="12" name="Text 10"/>
+          <p:cNvSpPr/>
+          <p:nvPr/>
+        </p:nvSpPr>
+        <p:spPr>
+          <a:xfrm>
+            <a:off x="6500576" y="2857500"/>
+            <a:ext cx="5011278" cy="50800"/>
+          </a:xfrm>
+          <a:prstGeom prst="rect">
+            <a:avLst/>
+          </a:prstGeom>
+          <a:solidFill>
+            <a:srgbClr val="111111"/>
+          </a:solidFill>
+          <a:ln/>
+        </p:spPr>
+        <p:txBody>
+          <a:bodyPr wrap="square" rtlCol="0" anchor="ctr"/>
+          <a:lstStyle/>
+          <a:p>
+            <a:pPr indent="0" marL="0">
+              <a:buNone/>
+            </a:pPr>
+            <a:endParaRPr lang="en-US" dirty="0"/>
+          </a:p>
+        </p:txBody>
+      </p:sp>
+      <p:sp>
+        <p:nvSpPr>
+          <p:cNvPr id="13" name="Text 11"/>
+          <p:cNvSpPr/>
+          <p:nvPr/>
+        </p:nvSpPr>
+        <p:spPr>
+          <a:xfrm>
+            <a:off x="6500576" y="3077567"/>
+            <a:ext cx="372374" cy="372467"/>
+          </a:xfrm>
+          <a:prstGeom prst="rect">
+            <a:avLst/>
+          </a:prstGeom>
+          <a:solidFill>
+            <a:srgbClr val="111111"/>
+          </a:solidFill>
+          <a:ln/>
+        </p:spPr>
+        <p:txBody>
+          <a:bodyPr wrap="square" rtlCol="0" anchor="ctr"/>
+          <a:lstStyle/>
+          <a:p>
+            <a:pPr indent="0" marL="0">
+              <a:buNone/>
+            </a:pPr>
+            <a:endParaRPr lang="en-US" dirty="0"/>
+          </a:p>
+        </p:txBody>
+      </p:sp>
+      <p:sp>
+        <p:nvSpPr>
+          <p:cNvPr id="14" name="Text 12"/>
+          <p:cNvSpPr/>
+          <p:nvPr/>
+        </p:nvSpPr>
+        <p:spPr>
+          <a:xfrm>
+            <a:off x="6500576" y="3079552"/>
+            <a:ext cx="379822" cy="368300"/>
+          </a:xfrm>
+          <a:prstGeom prst="rect">
+            <a:avLst/>
+          </a:prstGeom>
+          <a:noFill/>
+          <a:ln/>
+        </p:spPr>
+        <p:txBody>
+          <a:bodyPr wrap="square" lIns="0" tIns="0" rIns="0" bIns="0" rtlCol="0" anchor="t"/>
+          <a:lstStyle/>
+          <a:p>
+            <a:pPr algn="l" indent="0" marL="0">
+              <a:lnSpc>
+                <a:spcPts val="2900"/>
+              </a:lnSpc>
+              <a:buNone/>
+            </a:pPr>
+            <a:r>
+              <a:rPr lang="en-US" sz="2000" dirty="0">
+                <a:solidFill>
+                  <a:srgbClr val="F2F0EB"/>
+                </a:solidFill>
+                <a:latin typeface="ArchivoBlack" pitchFamily="34" charset="0"/>
+                <a:ea typeface="ArchivoBlack" pitchFamily="34" charset="-122"/>
+                <a:cs typeface="ArchivoBlack" pitchFamily="34" charset="-120"/>
+              </a:rPr>
+              <a:t>2</a:t>
+            </a:r>
+            <a:endParaRPr lang="en-US" sz="2000" dirty="0"/>
+          </a:p>
+        </p:txBody>
+      </p:sp>
+      <p:sp>
+        <p:nvSpPr>
+          <p:cNvPr id="15" name="Text 13"/>
+          <p:cNvSpPr/>
+          <p:nvPr/>
+        </p:nvSpPr>
+        <p:spPr>
+          <a:xfrm>
+            <a:off x="7076099" y="3077567"/>
+            <a:ext cx="4524470" cy="736600"/>
+          </a:xfrm>
+          <a:prstGeom prst="rect">
+            <a:avLst/>
+          </a:prstGeom>
+          <a:noFill/>
+          <a:ln/>
+        </p:spPr>
+        <p:txBody>
+          <a:bodyPr wrap="square" lIns="0" tIns="0" rIns="0" bIns="0" rtlCol="0" anchor="t"/>
+          <a:lstStyle/>
+          <a:p>
+            <a:pPr algn="l" indent="0" marL="0">
+              <a:lnSpc>
+                <a:spcPts val="2900"/>
+              </a:lnSpc>
+              <a:buNone/>
+            </a:pPr>
+            <a:r>
+              <a:rPr lang="en-US" sz="2000" dirty="0">
+                <a:solidFill>
+                  <a:srgbClr val="111111"/>
+                </a:solidFill>
+                <a:latin typeface="Inter" pitchFamily="34" charset="0"/>
+                <a:ea typeface="Inter" pitchFamily="34" charset="-122"/>
+                <a:cs typeface="Inter" pitchFamily="34" charset="-120"/>
+              </a:rPr>
+              <a:t>Which gap do we close first: the slow step or the missing field?</a:t>
+            </a:r>
+            <a:endParaRPr lang="en-US" sz="2000" dirty="0"/>
+          </a:p>
+        </p:txBody>
+      </p:sp>
+      <p:sp>
+        <p:nvSpPr>
+          <p:cNvPr id="16" name="Text 14"/>
+          <p:cNvSpPr/>
+          <p:nvPr/>
+        </p:nvSpPr>
+        <p:spPr>
+          <a:xfrm>
+            <a:off x="6500576" y="4017367"/>
+            <a:ext cx="5011278" cy="50800"/>
+          </a:xfrm>
+          <a:prstGeom prst="rect">
+            <a:avLst/>
+          </a:prstGeom>
+          <a:solidFill>
+            <a:srgbClr val="111111"/>
+          </a:solidFill>
+          <a:ln/>
+        </p:spPr>
+        <p:txBody>
+          <a:bodyPr wrap="square" rtlCol="0" anchor="ctr"/>
+          <a:lstStyle/>
+          <a:p>
+            <a:pPr indent="0" marL="0">
+              <a:buNone/>
+            </a:pPr>
+            <a:endParaRPr lang="en-US" dirty="0"/>
+          </a:p>
+        </p:txBody>
+      </p:sp>
+      <p:sp>
+        <p:nvSpPr>
+          <p:cNvPr id="17" name="Text 15"/>
+          <p:cNvSpPr/>
+          <p:nvPr/>
+        </p:nvSpPr>
+        <p:spPr>
+          <a:xfrm>
+            <a:off x="6500576" y="4237434"/>
+            <a:ext cx="372374" cy="372467"/>
+          </a:xfrm>
+          <a:prstGeom prst="rect">
+            <a:avLst/>
+          </a:prstGeom>
+          <a:solidFill>
+            <a:srgbClr val="111111"/>
+          </a:solidFill>
+          <a:ln/>
+        </p:spPr>
+        <p:txBody>
+          <a:bodyPr wrap="square" rtlCol="0" anchor="ctr"/>
+          <a:lstStyle/>
+          <a:p>
+            <a:pPr indent="0" marL="0">
+              <a:buNone/>
+            </a:pPr>
+            <a:endParaRPr lang="en-US" dirty="0"/>
+          </a:p>
+        </p:txBody>
+      </p:sp>
+      <p:sp>
+        <p:nvSpPr>
+          <p:cNvPr id="18" name="Text 16"/>
+          <p:cNvSpPr/>
+          <p:nvPr/>
+        </p:nvSpPr>
+        <p:spPr>
+          <a:xfrm>
+            <a:off x="6500576" y="4239419"/>
+            <a:ext cx="379822" cy="368300"/>
+          </a:xfrm>
+          <a:prstGeom prst="rect">
+            <a:avLst/>
+          </a:prstGeom>
+          <a:noFill/>
+          <a:ln/>
+        </p:spPr>
+        <p:txBody>
+          <a:bodyPr wrap="square" lIns="0" tIns="0" rIns="0" bIns="0" rtlCol="0" anchor="t"/>
+          <a:lstStyle/>
+          <a:p>
+            <a:pPr algn="l" indent="0" marL="0">
+              <a:lnSpc>
+                <a:spcPts val="2900"/>
+              </a:lnSpc>
+              <a:buNone/>
+            </a:pPr>
+            <a:r>
+              <a:rPr lang="en-US" sz="2000" dirty="0">
+                <a:solidFill>
+                  <a:srgbClr val="F2F0EB"/>
+                </a:solidFill>
+                <a:latin typeface="ArchivoBlack" pitchFamily="34" charset="0"/>
+                <a:ea typeface="ArchivoBlack" pitchFamily="34" charset="-122"/>
+                <a:cs typeface="ArchivoBlack" pitchFamily="34" charset="-120"/>
+              </a:rPr>
+              <a:t>3</a:t>
+            </a:r>
+            <a:endParaRPr lang="en-US" sz="2000" dirty="0"/>
+          </a:p>
+        </p:txBody>
+      </p:sp>
+      <p:sp>
+        <p:nvSpPr>
+          <p:cNvPr id="19" name="Text 17"/>
+          <p:cNvSpPr/>
+          <p:nvPr/>
+        </p:nvSpPr>
+        <p:spPr>
+          <a:xfrm>
+            <a:off x="7076099" y="4237434"/>
+            <a:ext cx="4524470" cy="736600"/>
+          </a:xfrm>
+          <a:prstGeom prst="rect">
+            <a:avLst/>
+          </a:prstGeom>
+          <a:noFill/>
+          <a:ln/>
+        </p:spPr>
+        <p:txBody>
+          <a:bodyPr wrap="square" lIns="0" tIns="0" rIns="0" bIns="0" rtlCol="0" anchor="t"/>
+          <a:lstStyle/>
+          <a:p>
+            <a:pPr algn="l" indent="0" marL="0">
+              <a:lnSpc>
+                <a:spcPts val="2900"/>
+              </a:lnSpc>
+              <a:buNone/>
+            </a:pPr>
+            <a:r>
+              <a:rPr lang="en-US" sz="2000" dirty="0">
+                <a:solidFill>
+                  <a:srgbClr val="111111"/>
+                </a:solidFill>
+                <a:latin typeface="Inter" pitchFamily="34" charset="0"/>
+                <a:ea typeface="Inter" pitchFamily="34" charset="-122"/>
+                <a:cs typeface="Inter" pitchFamily="34" charset="-120"/>
+              </a:rPr>
+              <a:t>What do we do with the drift that is already in production?</a:t>
+            </a:r>
+            <a:endParaRPr lang="en-US" sz="2000" dirty="0"/>
+          </a:p>
+        </p:txBody>
+      </p:sp>
+      <p:sp>
+        <p:nvSpPr>
+          <p:cNvPr id="20" name="Text 18"/>
+          <p:cNvSpPr/>
+          <p:nvPr/>
+        </p:nvSpPr>
+        <p:spPr>
+          <a:xfrm>
+            <a:off x="6500576" y="5177234"/>
+            <a:ext cx="5011278" cy="50800"/>
+          </a:xfrm>
+          <a:prstGeom prst="rect">
+            <a:avLst/>
+          </a:prstGeom>
+          <a:solidFill>
+            <a:srgbClr val="111111"/>
+          </a:solidFill>
+          <a:ln/>
+        </p:spPr>
+        <p:txBody>
+          <a:bodyPr wrap="square" rtlCol="0" anchor="ctr"/>
+          <a:lstStyle/>
+          <a:p>
+            <a:pPr indent="0" marL="0">
+              <a:buNone/>
+            </a:pPr>
+            <a:endParaRPr lang="en-US" dirty="0"/>
+          </a:p>
+        </p:txBody>
+      </p:sp>
+      <p:sp>
+        <p:nvSpPr>
+          <p:cNvPr id="21" name="Text 19"/>
+          <p:cNvSpPr/>
+          <p:nvPr/>
+        </p:nvSpPr>
+        <p:spPr>
+          <a:xfrm>
+            <a:off x="677098" y="5869384"/>
+            <a:ext cx="10834756" cy="50800"/>
+          </a:xfrm>
+          <a:prstGeom prst="rect">
+            <a:avLst/>
+          </a:prstGeom>
+          <a:solidFill>
+            <a:srgbClr val="111111"/>
+          </a:solidFill>
+          <a:ln/>
+        </p:spPr>
+        <p:txBody>
+          <a:bodyPr wrap="square" rtlCol="0" anchor="ctr"/>
+          <a:lstStyle/>
+          <a:p>
+            <a:pPr indent="0" marL="0">
+              <a:buNone/>
+            </a:pPr>
+            <a:endParaRPr lang="en-US" dirty="0"/>
+          </a:p>
+        </p:txBody>
+      </p:sp>
+      <p:sp>
+        <p:nvSpPr>
+          <p:cNvPr id="22" name="Text 20"/>
+          <p:cNvSpPr/>
+          <p:nvPr/>
+        </p:nvSpPr>
+        <p:spPr>
+          <a:xfrm>
+            <a:off x="677098" y="6055519"/>
+            <a:ext cx="2056338" cy="260747"/>
+          </a:xfrm>
+          <a:prstGeom prst="rect">
+            <a:avLst/>
+          </a:prstGeom>
+          <a:noFill/>
+          <a:ln/>
+        </p:spPr>
+        <p:txBody>
+          <a:bodyPr wrap="square" lIns="0" tIns="0" rIns="0" bIns="0" rtlCol="0" anchor="t"/>
+          <a:lstStyle/>
+          <a:p>
+            <a:pPr algn="l" indent="0" marL="0">
+              <a:lnSpc>
+                <a:spcPts val="2053"/>
+              </a:lnSpc>
+              <a:buNone/>
+            </a:pPr>
+            <a:r>
+              <a:rPr lang="en-US" sz="1466" dirty="0">
+                <a:solidFill>
+                  <a:srgbClr val="111111"/>
+                </a:solidFill>
+                <a:latin typeface="Inter" pitchFamily="34" charset="0"/>
+                <a:ea typeface="Inter" pitchFamily="34" charset="-122"/>
+                <a:cs typeface="Inter" pitchFamily="34" charset="-120"/>
+              </a:rPr>
+              <a:t>PRESENTER · TEAM</a:t>
+            </a:r>
+            <a:endParaRPr lang="en-US" sz="1466" dirty="0"/>
+          </a:p>
+        </p:txBody>
+      </p:sp>
+      <p:sp>
+        <p:nvSpPr>
+          <p:cNvPr id="23" name="Text 21"/>
+          <p:cNvSpPr/>
+          <p:nvPr/>
+        </p:nvSpPr>
+        <p:spPr>
+          <a:xfrm>
+            <a:off x="8890357" y="6055519"/>
+            <a:ext cx="2673928" cy="260747"/>
+          </a:xfrm>
+          <a:prstGeom prst="rect">
+            <a:avLst/>
+          </a:prstGeom>
+          <a:noFill/>
+          <a:ln/>
+        </p:spPr>
+        <p:txBody>
+          <a:bodyPr wrap="square" lIns="0" tIns="0" rIns="0" bIns="0" rtlCol="0" anchor="t"/>
+          <a:lstStyle/>
+          <a:p>
+            <a:pPr algn="l" indent="0" marL="0">
+              <a:lnSpc>
+                <a:spcPts val="2053"/>
+              </a:lnSpc>
+              <a:buNone/>
+            </a:pPr>
+            <a:r>
+              <a:rPr lang="en-US" sz="1466" dirty="0">
+                <a:solidFill>
+                  <a:srgbClr val="111111"/>
+                </a:solidFill>
+                <a:latin typeface="Inter" pitchFamily="34" charset="0"/>
+                <a:ea typeface="Inter" pitchFamily="34" charset="-122"/>
+                <a:cs typeface="Inter" pitchFamily="34" charset="-120"/>
+              </a:rPr>
+              <a:t>INFRASTRUCTURE DRIFT</a:t>
+            </a:r>
+            <a:endParaRPr lang="en-US" sz="1466" dirty="0"/>
+          </a:p>
+        </p:txBody>
+      </p:sp>
     </p:spTree>
   </p:cSld>
   <p:clrMapOvr>

--- a/decks/iac-drift/iac-drift.pptx
+++ b/decks/iac-drift/iac-drift.pptx
@@ -1249,7 +1249,7 @@
           <a:ln/>
         </p:spPr>
         <p:txBody>
-          <a:bodyPr wrap="square" lIns="0" tIns="0" rIns="0" bIns="0" rtlCol="0" anchor="t"/>
+          <a:bodyPr wrap="none" lIns="0" tIns="0" rIns="0" bIns="0" rtlCol="0" anchor="t"/>
           <a:lstStyle/>
           <a:p>
             <a:pPr algn="l" indent="0" marL="0">
@@ -1291,7 +1291,7 @@
           <a:ln/>
         </p:spPr>
         <p:txBody>
-          <a:bodyPr wrap="square" lIns="0" tIns="0" rIns="0" bIns="0" rtlCol="0" anchor="t"/>
+          <a:bodyPr wrap="none" lIns="0" tIns="0" rIns="0" bIns="0" rtlCol="0" anchor="t"/>
           <a:lstStyle/>
           <a:p>
             <a:pPr algn="l" indent="0" marL="0">
@@ -1363,7 +1363,7 @@
           <a:ln/>
         </p:spPr>
         <p:txBody>
-          <a:bodyPr wrap="square" lIns="0" tIns="0" rIns="0" bIns="0" rtlCol="0" anchor="t"/>
+          <a:bodyPr wrap="none" lIns="0" tIns="0" rIns="0" bIns="0" rtlCol="0" anchor="t"/>
           <a:lstStyle/>
           <a:p>
             <a:pPr algn="l" indent="0" marL="0">
@@ -1405,7 +1405,7 @@
           <a:ln/>
         </p:spPr>
         <p:txBody>
-          <a:bodyPr wrap="square" lIns="0" tIns="0" rIns="0" bIns="0" rtlCol="0" anchor="t"/>
+          <a:bodyPr wrap="none" lIns="0" tIns="0" rIns="0" bIns="0" rtlCol="0" anchor="t"/>
           <a:lstStyle/>
           <a:p>
             <a:pPr algn="l" indent="0" marL="0">
@@ -1477,7 +1477,7 @@
           <a:ln/>
         </p:spPr>
         <p:txBody>
-          <a:bodyPr wrap="square" lIns="0" tIns="0" rIns="0" bIns="0" rtlCol="0" anchor="t"/>
+          <a:bodyPr wrap="none" lIns="0" tIns="0" rIns="0" bIns="0" rtlCol="0" anchor="t"/>
           <a:lstStyle/>
           <a:p>
             <a:pPr algn="l" indent="0" marL="0">
@@ -1519,7 +1519,7 @@
           <a:ln/>
         </p:spPr>
         <p:txBody>
-          <a:bodyPr wrap="square" lIns="0" tIns="0" rIns="0" bIns="0" rtlCol="0" anchor="t"/>
+          <a:bodyPr wrap="none" lIns="0" tIns="0" rIns="0" bIns="0" rtlCol="0" anchor="t"/>
           <a:lstStyle/>
           <a:p>
             <a:pPr algn="l" indent="0" marL="0">
@@ -1561,7 +1561,7 @@
           <a:ln/>
         </p:spPr>
         <p:txBody>
-          <a:bodyPr wrap="square" lIns="0" tIns="0" rIns="0" bIns="0" rtlCol="0" anchor="t"/>
+          <a:bodyPr wrap="none" lIns="0" tIns="0" rIns="0" bIns="0" rtlCol="0" anchor="t"/>
           <a:lstStyle/>
           <a:p>
             <a:pPr algn="l" indent="0" marL="0">
@@ -1603,7 +1603,7 @@
           <a:ln/>
         </p:spPr>
         <p:txBody>
-          <a:bodyPr wrap="square" lIns="0" tIns="0" rIns="0" bIns="0" rtlCol="0" anchor="t"/>
+          <a:bodyPr wrap="none" lIns="0" tIns="0" rIns="0" bIns="0" rtlCol="0" anchor="t"/>
           <a:lstStyle/>
           <a:p>
             <a:pPr algn="l" indent="0" marL="0">
@@ -1678,7 +1678,7 @@
           <a:ln/>
         </p:spPr>
         <p:txBody>
-          <a:bodyPr wrap="square" lIns="0" tIns="0" rIns="0" bIns="0" rtlCol="0" anchor="t"/>
+          <a:bodyPr wrap="none" lIns="0" tIns="0" rIns="0" bIns="0" rtlCol="0" anchor="t"/>
           <a:lstStyle/>
           <a:p>
             <a:pPr algn="l" indent="0" marL="0">
@@ -1720,7 +1720,7 @@
           <a:ln/>
         </p:spPr>
         <p:txBody>
-          <a:bodyPr wrap="square" lIns="0" tIns="0" rIns="0" bIns="0" rtlCol="0" anchor="t"/>
+          <a:bodyPr wrap="none" lIns="0" tIns="0" rIns="0" bIns="0" rtlCol="0" anchor="t"/>
           <a:lstStyle/>
           <a:p>
             <a:pPr algn="l" indent="0" marL="0">
@@ -1794,7 +1794,7 @@
           <a:ln/>
         </p:spPr>
         <p:txBody>
-          <a:bodyPr wrap="square" lIns="0" tIns="0" rIns="0" bIns="0" rtlCol="0" anchor="t"/>
+          <a:bodyPr wrap="none" lIns="0" tIns="0" rIns="0" bIns="0" rtlCol="0" anchor="t"/>
           <a:lstStyle/>
           <a:p>
             <a:pPr algn="l" indent="0" marL="0">
@@ -1836,7 +1836,7 @@
           <a:ln/>
         </p:spPr>
         <p:txBody>
-          <a:bodyPr wrap="square" lIns="0" tIns="0" rIns="0" bIns="0" rtlCol="0" anchor="t"/>
+          <a:bodyPr wrap="none" lIns="0" tIns="0" rIns="0" bIns="0" rtlCol="0" anchor="t"/>
           <a:lstStyle/>
           <a:p>
             <a:pPr algn="l" indent="0" marL="0">
@@ -1908,7 +1908,7 @@
           <a:ln/>
         </p:spPr>
         <p:txBody>
-          <a:bodyPr wrap="square" lIns="0" tIns="0" rIns="0" bIns="0" rtlCol="0" anchor="t"/>
+          <a:bodyPr wrap="none" lIns="0" tIns="0" rIns="0" bIns="0" rtlCol="0" anchor="t"/>
           <a:lstStyle/>
           <a:p>
             <a:pPr algn="l" indent="0" marL="0">
@@ -2015,7 +2015,7 @@
           <a:ln/>
         </p:spPr>
         <p:txBody>
-          <a:bodyPr wrap="square" lIns="0" tIns="0" rIns="0" bIns="0" rtlCol="0" anchor="t"/>
+          <a:bodyPr wrap="none" lIns="0" tIns="0" rIns="0" bIns="0" rtlCol="0" anchor="t"/>
           <a:lstStyle/>
           <a:p>
             <a:pPr algn="l" indent="0" marL="0">
@@ -2060,7 +2060,9 @@
           <a:ln/>
         </p:spPr>
         <p:txBody>
-          <a:bodyPr wrap="square" lIns="0" tIns="0" rIns="0" bIns="0" rtlCol="0" anchor="t"/>
+          <a:bodyPr wrap="square" lIns="0" tIns="0" rIns="0" bIns="0" rtlCol="0" anchor="t">
+            <a:normAutofit/>
+          </a:bodyPr>
           <a:lstStyle/>
           <a:p>
             <a:pPr algn="l" indent="0" marL="0">
@@ -2197,7 +2199,7 @@
           <a:ln/>
         </p:spPr>
         <p:txBody>
-          <a:bodyPr wrap="square" lIns="0" tIns="0" rIns="0" bIns="0" rtlCol="0" anchor="t"/>
+          <a:bodyPr wrap="none" lIns="0" tIns="0" rIns="0" bIns="0" rtlCol="0" anchor="t"/>
           <a:lstStyle/>
           <a:p>
             <a:pPr algn="l" indent="0" marL="0">
@@ -2242,7 +2244,9 @@
           <a:ln/>
         </p:spPr>
         <p:txBody>
-          <a:bodyPr wrap="square" lIns="0" tIns="0" rIns="0" bIns="0" rtlCol="0" anchor="t"/>
+          <a:bodyPr wrap="square" lIns="0" tIns="0" rIns="0" bIns="0" rtlCol="0" anchor="t">
+            <a:normAutofit/>
+          </a:bodyPr>
           <a:lstStyle/>
           <a:p>
             <a:pPr algn="l" indent="0" marL="0">
@@ -2379,7 +2383,7 @@
           <a:ln/>
         </p:spPr>
         <p:txBody>
-          <a:bodyPr wrap="square" lIns="0" tIns="0" rIns="0" bIns="0" rtlCol="0" anchor="t"/>
+          <a:bodyPr wrap="none" lIns="0" tIns="0" rIns="0" bIns="0" rtlCol="0" anchor="t"/>
           <a:lstStyle/>
           <a:p>
             <a:pPr algn="l" indent="0" marL="0">
@@ -2424,7 +2428,9 @@
           <a:ln/>
         </p:spPr>
         <p:txBody>
-          <a:bodyPr wrap="square" lIns="0" tIns="0" rIns="0" bIns="0" rtlCol="0" anchor="t"/>
+          <a:bodyPr wrap="square" lIns="0" tIns="0" rIns="0" bIns="0" rtlCol="0" anchor="t">
+            <a:normAutofit/>
+          </a:bodyPr>
           <a:lstStyle/>
           <a:p>
             <a:pPr algn="l" indent="0" marL="0">
@@ -2561,7 +2567,7 @@
           <a:ln/>
         </p:spPr>
         <p:txBody>
-          <a:bodyPr wrap="square" lIns="0" tIns="0" rIns="0" bIns="0" rtlCol="0" anchor="t"/>
+          <a:bodyPr wrap="none" lIns="0" tIns="0" rIns="0" bIns="0" rtlCol="0" anchor="t"/>
           <a:lstStyle/>
           <a:p>
             <a:pPr algn="l" indent="0" marL="0">
@@ -2606,7 +2612,9 @@
           <a:ln/>
         </p:spPr>
         <p:txBody>
-          <a:bodyPr wrap="square" lIns="0" tIns="0" rIns="0" bIns="0" rtlCol="0" anchor="t"/>
+          <a:bodyPr wrap="square" lIns="0" tIns="0" rIns="0" bIns="0" rtlCol="0" anchor="t">
+            <a:normAutofit/>
+          </a:bodyPr>
           <a:lstStyle/>
           <a:p>
             <a:pPr algn="l" indent="0" marL="0">
@@ -2681,7 +2689,9 @@
           <a:ln/>
         </p:spPr>
         <p:txBody>
-          <a:bodyPr wrap="square" lIns="0" tIns="0" rIns="0" bIns="0" rtlCol="0" anchor="t"/>
+          <a:bodyPr wrap="square" lIns="0" tIns="0" rIns="0" bIns="0" rtlCol="0" anchor="t">
+            <a:normAutofit/>
+          </a:bodyPr>
           <a:lstStyle/>
           <a:p>
             <a:pPr algn="l" indent="0" marL="0">
@@ -2776,7 +2786,7 @@
           <a:ln/>
         </p:spPr>
         <p:txBody>
-          <a:bodyPr wrap="square" lIns="0" tIns="0" rIns="0" bIns="0" rtlCol="0" anchor="t"/>
+          <a:bodyPr wrap="none" lIns="0" tIns="0" rIns="0" bIns="0" rtlCol="0" anchor="t"/>
           <a:lstStyle/>
           <a:p>
             <a:pPr algn="l" indent="0" marL="0">
@@ -2818,7 +2828,7 @@
           <a:ln/>
         </p:spPr>
         <p:txBody>
-          <a:bodyPr wrap="square" lIns="0" tIns="0" rIns="0" bIns="0" rtlCol="0" anchor="t"/>
+          <a:bodyPr wrap="none" lIns="0" tIns="0" rIns="0" bIns="0" rtlCol="0" anchor="t"/>
           <a:lstStyle/>
           <a:p>
             <a:pPr algn="l" indent="0" marL="0">
@@ -2892,7 +2902,7 @@
           <a:ln/>
         </p:spPr>
         <p:txBody>
-          <a:bodyPr wrap="square" lIns="0" tIns="0" rIns="0" bIns="0" rtlCol="0" anchor="t"/>
+          <a:bodyPr wrap="none" lIns="0" tIns="0" rIns="0" bIns="0" rtlCol="0" anchor="t"/>
           <a:lstStyle/>
           <a:p>
             <a:pPr algn="l" indent="0" marL="0">
@@ -2934,7 +2944,7 @@
           <a:ln/>
         </p:spPr>
         <p:txBody>
-          <a:bodyPr wrap="square" lIns="0" tIns="0" rIns="0" bIns="0" rtlCol="0" anchor="t"/>
+          <a:bodyPr wrap="none" lIns="0" tIns="0" rIns="0" bIns="0" rtlCol="0" anchor="t"/>
           <a:lstStyle/>
           <a:p>
             <a:pPr algn="l" indent="0" marL="0">
@@ -3006,7 +3016,7 @@
           <a:ln/>
         </p:spPr>
         <p:txBody>
-          <a:bodyPr wrap="square" lIns="0" tIns="0" rIns="0" bIns="0" rtlCol="0" anchor="t"/>
+          <a:bodyPr wrap="none" lIns="0" tIns="0" rIns="0" bIns="0" rtlCol="0" anchor="t"/>
           <a:lstStyle/>
           <a:p>
             <a:pPr algn="l" indent="0" marL="0">
@@ -3081,7 +3091,7 @@
           <a:ln/>
         </p:spPr>
         <p:txBody>
-          <a:bodyPr wrap="square" lIns="0" tIns="0" rIns="0" bIns="0" rtlCol="0" anchor="t"/>
+          <a:bodyPr wrap="none" lIns="0" tIns="0" rIns="0" bIns="0" rtlCol="0" anchor="t"/>
           <a:lstStyle/>
           <a:p>
             <a:pPr algn="l" indent="0" marL="0">
@@ -3123,7 +3133,7 @@
           <a:ln/>
         </p:spPr>
         <p:txBody>
-          <a:bodyPr wrap="square" lIns="0" tIns="0" rIns="0" bIns="0" rtlCol="0" anchor="t"/>
+          <a:bodyPr wrap="none" lIns="0" tIns="0" rIns="0" bIns="0" rtlCol="0" anchor="t"/>
           <a:lstStyle/>
           <a:p>
             <a:pPr algn="l" indent="0" marL="0">
@@ -3198,7 +3208,9 @@
           <a:ln/>
         </p:spPr>
         <p:txBody>
-          <a:bodyPr wrap="square" lIns="0" tIns="0" rIns="0" bIns="0" rtlCol="0" anchor="t"/>
+          <a:bodyPr wrap="square" lIns="0" tIns="0" rIns="0" bIns="0" rtlCol="0" anchor="t">
+            <a:normAutofit/>
+          </a:bodyPr>
           <a:lstStyle/>
           <a:p>
             <a:pPr algn="l" indent="0" marL="0">
@@ -3270,7 +3282,7 @@
           <a:ln/>
         </p:spPr>
         <p:txBody>
-          <a:bodyPr wrap="square" lIns="0" tIns="0" rIns="0" bIns="0" rtlCol="0" anchor="t"/>
+          <a:bodyPr wrap="none" lIns="0" tIns="0" rIns="0" bIns="0" rtlCol="0" anchor="t"/>
           <a:lstStyle/>
           <a:p>
             <a:pPr algn="l" indent="0" marL="0">
@@ -3312,7 +3324,7 @@
           <a:ln/>
         </p:spPr>
         <p:txBody>
-          <a:bodyPr wrap="square" lIns="0" tIns="0" rIns="0" bIns="0" rtlCol="0" anchor="t"/>
+          <a:bodyPr wrap="none" lIns="0" tIns="0" rIns="0" bIns="0" rtlCol="0" anchor="t"/>
           <a:lstStyle/>
           <a:p>
             <a:pPr algn="l" indent="0" marL="0">
@@ -3387,7 +3399,9 @@
           <a:ln/>
         </p:spPr>
         <p:txBody>
-          <a:bodyPr wrap="square" lIns="0" tIns="0" rIns="0" bIns="0" rtlCol="0" anchor="t"/>
+          <a:bodyPr wrap="square" lIns="0" tIns="0" rIns="0" bIns="0" rtlCol="0" anchor="t">
+            <a:normAutofit/>
+          </a:bodyPr>
           <a:lstStyle/>
           <a:p>
             <a:pPr algn="l" indent="0" marL="0">
@@ -3459,7 +3473,7 @@
           <a:ln/>
         </p:spPr>
         <p:txBody>
-          <a:bodyPr wrap="square" lIns="0" tIns="0" rIns="0" bIns="0" rtlCol="0" anchor="t"/>
+          <a:bodyPr wrap="none" lIns="0" tIns="0" rIns="0" bIns="0" rtlCol="0" anchor="t"/>
           <a:lstStyle/>
           <a:p>
             <a:pPr algn="l" indent="0" marL="0">
@@ -3501,7 +3515,7 @@
           <a:ln/>
         </p:spPr>
         <p:txBody>
-          <a:bodyPr wrap="square" lIns="0" tIns="0" rIns="0" bIns="0" rtlCol="0" anchor="t"/>
+          <a:bodyPr wrap="none" lIns="0" tIns="0" rIns="0" bIns="0" rtlCol="0" anchor="t"/>
           <a:lstStyle/>
           <a:p>
             <a:pPr algn="l" indent="0" marL="0">
@@ -3576,7 +3590,9 @@
           <a:ln/>
         </p:spPr>
         <p:txBody>
-          <a:bodyPr wrap="square" lIns="0" tIns="0" rIns="0" bIns="0" rtlCol="0" anchor="t"/>
+          <a:bodyPr wrap="square" lIns="0" tIns="0" rIns="0" bIns="0" rtlCol="0" anchor="t">
+            <a:normAutofit/>
+          </a:bodyPr>
           <a:lstStyle/>
           <a:p>
             <a:pPr algn="l" indent="0" marL="0">
@@ -3648,7 +3664,7 @@
           <a:ln/>
         </p:spPr>
         <p:txBody>
-          <a:bodyPr wrap="square" lIns="0" tIns="0" rIns="0" bIns="0" rtlCol="0" anchor="t"/>
+          <a:bodyPr wrap="none" lIns="0" tIns="0" rIns="0" bIns="0" rtlCol="0" anchor="t"/>
           <a:lstStyle/>
           <a:p>
             <a:pPr algn="l" indent="0" marL="0">
@@ -3720,7 +3736,7 @@
           <a:ln/>
         </p:spPr>
         <p:txBody>
-          <a:bodyPr wrap="square" lIns="0" tIns="0" rIns="0" bIns="0" rtlCol="0" anchor="t"/>
+          <a:bodyPr wrap="none" lIns="0" tIns="0" rIns="0" bIns="0" rtlCol="0" anchor="t"/>
           <a:lstStyle/>
           <a:p>
             <a:pPr algn="l" indent="0" marL="0">
@@ -3762,7 +3778,7 @@
           <a:ln/>
         </p:spPr>
         <p:txBody>
-          <a:bodyPr wrap="square" lIns="0" tIns="0" rIns="0" bIns="0" rtlCol="0" anchor="t"/>
+          <a:bodyPr wrap="none" lIns="0" tIns="0" rIns="0" bIns="0" rtlCol="0" anchor="t"/>
           <a:lstStyle/>
           <a:p>
             <a:pPr algn="l" indent="0" marL="0">
@@ -3836,7 +3852,7 @@
           <a:ln/>
         </p:spPr>
         <p:txBody>
-          <a:bodyPr wrap="square" lIns="0" tIns="0" rIns="0" bIns="0" rtlCol="0" anchor="t"/>
+          <a:bodyPr wrap="none" lIns="0" tIns="0" rIns="0" bIns="0" rtlCol="0" anchor="t"/>
           <a:lstStyle/>
           <a:p>
             <a:pPr algn="l" indent="0" marL="0">
@@ -3878,7 +3894,7 @@
           <a:ln/>
         </p:spPr>
         <p:txBody>
-          <a:bodyPr wrap="square" lIns="0" tIns="0" rIns="0" bIns="0" rtlCol="0" anchor="t"/>
+          <a:bodyPr wrap="none" lIns="0" tIns="0" rIns="0" bIns="0" rtlCol="0" anchor="t"/>
           <a:lstStyle/>
           <a:p>
             <a:pPr algn="l" indent="0" marL="0">
@@ -3950,7 +3966,7 @@
           <a:ln/>
         </p:spPr>
         <p:txBody>
-          <a:bodyPr wrap="square" lIns="0" tIns="0" rIns="0" bIns="0" rtlCol="0" anchor="t"/>
+          <a:bodyPr wrap="none" lIns="0" tIns="0" rIns="0" bIns="0" rtlCol="0" anchor="t"/>
           <a:lstStyle/>
           <a:p>
             <a:pPr algn="l" indent="0" marL="0">
@@ -4055,7 +4071,7 @@
           <a:ln/>
         </p:spPr>
         <p:txBody>
-          <a:bodyPr wrap="square" lIns="0" tIns="0" rIns="0" bIns="0" rtlCol="0" anchor="t"/>
+          <a:bodyPr wrap="none" lIns="0" tIns="0" rIns="0" bIns="0" rtlCol="0" anchor="t"/>
           <a:lstStyle/>
           <a:p>
             <a:pPr algn="l" indent="0" marL="0">
@@ -4097,7 +4113,7 @@
           <a:ln/>
         </p:spPr>
         <p:txBody>
-          <a:bodyPr wrap="square" lIns="0" tIns="0" rIns="0" bIns="0" rtlCol="0" anchor="t"/>
+          <a:bodyPr wrap="none" lIns="0" tIns="0" rIns="0" bIns="0" rtlCol="0" anchor="t"/>
           <a:lstStyle/>
           <a:p>
             <a:pPr algn="l" indent="0" marL="0">
@@ -4139,7 +4155,9 @@
           <a:ln/>
         </p:spPr>
         <p:txBody>
-          <a:bodyPr wrap="square" lIns="0" tIns="0" rIns="0" bIns="0" rtlCol="0" anchor="t"/>
+          <a:bodyPr wrap="square" lIns="0" tIns="0" rIns="0" bIns="0" rtlCol="0" anchor="t">
+            <a:normAutofit/>
+          </a:bodyPr>
           <a:lstStyle/>
           <a:p>
             <a:pPr algn="l" indent="0" marL="0">
@@ -4241,7 +4259,7 @@
           <a:ln/>
         </p:spPr>
         <p:txBody>
-          <a:bodyPr wrap="square" lIns="0" tIns="0" rIns="0" bIns="0" rtlCol="0" anchor="t"/>
+          <a:bodyPr wrap="none" lIns="0" tIns="0" rIns="0" bIns="0" rtlCol="0" anchor="t"/>
           <a:lstStyle/>
           <a:p>
             <a:pPr algn="l" indent="0" marL="0">
@@ -4283,7 +4301,7 @@
           <a:ln/>
         </p:spPr>
         <p:txBody>
-          <a:bodyPr wrap="square" lIns="0" tIns="0" rIns="0" bIns="0" rtlCol="0" anchor="t"/>
+          <a:bodyPr wrap="none" lIns="0" tIns="0" rIns="0" bIns="0" rtlCol="0" anchor="t"/>
           <a:lstStyle/>
           <a:p>
             <a:pPr algn="l" indent="0" marL="0">
@@ -4325,7 +4343,9 @@
           <a:ln/>
         </p:spPr>
         <p:txBody>
-          <a:bodyPr wrap="square" lIns="0" tIns="0" rIns="0" bIns="0" rtlCol="0" anchor="t"/>
+          <a:bodyPr wrap="square" lIns="0" tIns="0" rIns="0" bIns="0" rtlCol="0" anchor="t">
+            <a:normAutofit/>
+          </a:bodyPr>
           <a:lstStyle/>
           <a:p>
             <a:pPr algn="l" indent="0" marL="0">
@@ -4427,7 +4447,7 @@
           <a:ln/>
         </p:spPr>
         <p:txBody>
-          <a:bodyPr wrap="square" lIns="0" tIns="0" rIns="0" bIns="0" rtlCol="0" anchor="t"/>
+          <a:bodyPr wrap="none" lIns="0" tIns="0" rIns="0" bIns="0" rtlCol="0" anchor="t"/>
           <a:lstStyle/>
           <a:p>
             <a:pPr algn="l" indent="0" marL="0">
@@ -4469,7 +4489,7 @@
           <a:ln/>
         </p:spPr>
         <p:txBody>
-          <a:bodyPr wrap="square" lIns="0" tIns="0" rIns="0" bIns="0" rtlCol="0" anchor="t"/>
+          <a:bodyPr wrap="none" lIns="0" tIns="0" rIns="0" bIns="0" rtlCol="0" anchor="t"/>
           <a:lstStyle/>
           <a:p>
             <a:pPr algn="l" indent="0" marL="0">
@@ -4511,7 +4531,9 @@
           <a:ln/>
         </p:spPr>
         <p:txBody>
-          <a:bodyPr wrap="square" lIns="0" tIns="0" rIns="0" bIns="0" rtlCol="0" anchor="t"/>
+          <a:bodyPr wrap="square" lIns="0" tIns="0" rIns="0" bIns="0" rtlCol="0" anchor="t">
+            <a:normAutofit/>
+          </a:bodyPr>
           <a:lstStyle/>
           <a:p>
             <a:pPr algn="l" indent="0" marL="0">
@@ -4583,7 +4605,7 @@
           <a:ln/>
         </p:spPr>
         <p:txBody>
-          <a:bodyPr wrap="square" lIns="0" tIns="0" rIns="0" bIns="0" rtlCol="0" anchor="t"/>
+          <a:bodyPr wrap="none" lIns="0" tIns="0" rIns="0" bIns="0" rtlCol="0" anchor="t"/>
           <a:lstStyle/>
           <a:p>
             <a:pPr algn="l" indent="0" marL="0">
@@ -4658,7 +4680,7 @@
           <a:ln/>
         </p:spPr>
         <p:txBody>
-          <a:bodyPr wrap="square" lIns="0" tIns="0" rIns="0" bIns="0" rtlCol="0" anchor="t"/>
+          <a:bodyPr wrap="none" lIns="0" tIns="0" rIns="0" bIns="0" rtlCol="0" anchor="t"/>
           <a:lstStyle/>
           <a:p>
             <a:pPr algn="l" indent="0" marL="0">
@@ -4700,7 +4722,7 @@
           <a:ln/>
         </p:spPr>
         <p:txBody>
-          <a:bodyPr wrap="square" lIns="0" tIns="0" rIns="0" bIns="0" rtlCol="0" anchor="t"/>
+          <a:bodyPr wrap="none" lIns="0" tIns="0" rIns="0" bIns="0" rtlCol="0" anchor="t"/>
           <a:lstStyle/>
           <a:p>
             <a:pPr algn="l" indent="0" marL="0">
@@ -4774,7 +4796,7 @@
           <a:ln/>
         </p:spPr>
         <p:txBody>
-          <a:bodyPr wrap="square" lIns="0" tIns="0" rIns="0" bIns="0" rtlCol="0" anchor="t"/>
+          <a:bodyPr wrap="none" lIns="0" tIns="0" rIns="0" bIns="0" rtlCol="0" anchor="t"/>
           <a:lstStyle/>
           <a:p>
             <a:pPr algn="l" indent="0" marL="0">
@@ -4816,7 +4838,7 @@
           <a:ln/>
         </p:spPr>
         <p:txBody>
-          <a:bodyPr wrap="square" lIns="0" tIns="0" rIns="0" bIns="0" rtlCol="0" anchor="t"/>
+          <a:bodyPr wrap="none" lIns="0" tIns="0" rIns="0" bIns="0" rtlCol="0" anchor="t"/>
           <a:lstStyle/>
           <a:p>
             <a:pPr algn="l" indent="0" marL="0">
@@ -4888,7 +4910,7 @@
           <a:ln/>
         </p:spPr>
         <p:txBody>
-          <a:bodyPr wrap="square" lIns="0" tIns="0" rIns="0" bIns="0" rtlCol="0" anchor="t"/>
+          <a:bodyPr wrap="none" lIns="0" tIns="0" rIns="0" bIns="0" rtlCol="0" anchor="t"/>
           <a:lstStyle/>
           <a:p>
             <a:pPr algn="l" indent="0" marL="0">
@@ -4930,7 +4952,7 @@
           <a:ln/>
         </p:spPr>
         <p:txBody>
-          <a:bodyPr wrap="square" lIns="0" tIns="0" rIns="0" bIns="0" rtlCol="0" anchor="t"/>
+          <a:bodyPr wrap="none" lIns="0" tIns="0" rIns="0" bIns="0" rtlCol="0" anchor="t"/>
           <a:lstStyle/>
           <a:p>
             <a:pPr algn="l" indent="0" marL="0">
@@ -4972,7 +4994,7 @@
           <a:ln/>
         </p:spPr>
         <p:txBody>
-          <a:bodyPr wrap="square" lIns="0" tIns="0" rIns="0" bIns="0" rtlCol="0" anchor="t"/>
+          <a:bodyPr wrap="none" lIns="0" tIns="0" rIns="0" bIns="0" rtlCol="0" anchor="t"/>
           <a:lstStyle/>
           <a:p>
             <a:pPr algn="l" indent="0" marL="0">
@@ -5074,7 +5096,7 @@
           <a:ln/>
         </p:spPr>
         <p:txBody>
-          <a:bodyPr wrap="square" lIns="0" tIns="0" rIns="0" bIns="0" rtlCol="0" anchor="t"/>
+          <a:bodyPr wrap="none" lIns="0" tIns="0" rIns="0" bIns="0" rtlCol="0" anchor="t"/>
           <a:lstStyle/>
           <a:p>
             <a:pPr algn="l" indent="0" marL="0">
@@ -5116,7 +5138,9 @@
           <a:ln/>
         </p:spPr>
         <p:txBody>
-          <a:bodyPr wrap="square" lIns="0" tIns="0" rIns="0" bIns="0" rtlCol="0" anchor="t"/>
+          <a:bodyPr wrap="square" lIns="0" tIns="0" rIns="0" bIns="0" rtlCol="0" anchor="t">
+            <a:normAutofit/>
+          </a:bodyPr>
           <a:lstStyle/>
           <a:p>
             <a:pPr algn="l" indent="0" marL="0">
@@ -5218,7 +5242,7 @@
           <a:ln/>
         </p:spPr>
         <p:txBody>
-          <a:bodyPr wrap="square" lIns="0" tIns="0" rIns="0" bIns="0" rtlCol="0" anchor="t"/>
+          <a:bodyPr wrap="none" lIns="0" tIns="0" rIns="0" bIns="0" rtlCol="0" anchor="t"/>
           <a:lstStyle/>
           <a:p>
             <a:pPr algn="l" indent="0" marL="0">
@@ -5260,7 +5284,9 @@
           <a:ln/>
         </p:spPr>
         <p:txBody>
-          <a:bodyPr wrap="square" lIns="0" tIns="0" rIns="0" bIns="0" rtlCol="0" anchor="t"/>
+          <a:bodyPr wrap="square" lIns="0" tIns="0" rIns="0" bIns="0" rtlCol="0" anchor="t">
+            <a:normAutofit/>
+          </a:bodyPr>
           <a:lstStyle/>
           <a:p>
             <a:pPr algn="l" indent="0" marL="0">
@@ -5362,7 +5388,7 @@
           <a:ln/>
         </p:spPr>
         <p:txBody>
-          <a:bodyPr wrap="square" lIns="0" tIns="0" rIns="0" bIns="0" rtlCol="0" anchor="t"/>
+          <a:bodyPr wrap="none" lIns="0" tIns="0" rIns="0" bIns="0" rtlCol="0" anchor="t"/>
           <a:lstStyle/>
           <a:p>
             <a:pPr algn="l" indent="0" marL="0">
@@ -5404,7 +5430,9 @@
           <a:ln/>
         </p:spPr>
         <p:txBody>
-          <a:bodyPr wrap="square" lIns="0" tIns="0" rIns="0" bIns="0" rtlCol="0" anchor="t"/>
+          <a:bodyPr wrap="square" lIns="0" tIns="0" rIns="0" bIns="0" rtlCol="0" anchor="t">
+            <a:normAutofit/>
+          </a:bodyPr>
           <a:lstStyle/>
           <a:p>
             <a:pPr algn="l" indent="0" marL="0">
@@ -5506,7 +5534,7 @@
           <a:ln/>
         </p:spPr>
         <p:txBody>
-          <a:bodyPr wrap="square" lIns="0" tIns="0" rIns="0" bIns="0" rtlCol="0" anchor="t"/>
+          <a:bodyPr wrap="none" lIns="0" tIns="0" rIns="0" bIns="0" rtlCol="0" anchor="t"/>
           <a:lstStyle/>
           <a:p>
             <a:pPr algn="l" indent="0" marL="0">
@@ -5548,7 +5576,7 @@
           <a:ln/>
         </p:spPr>
         <p:txBody>
-          <a:bodyPr wrap="square" lIns="0" tIns="0" rIns="0" bIns="0" rtlCol="0" anchor="t"/>
+          <a:bodyPr wrap="none" lIns="0" tIns="0" rIns="0" bIns="0" rtlCol="0" anchor="t"/>
           <a:lstStyle/>
           <a:p>
             <a:pPr algn="l" indent="0" marL="0">
